--- a/instructor/LLM2Life_slide_deck.pptx
+++ b/instructor/LLM2Life_slide_deck.pptx
@@ -5615,7 +5615,7 @@
                 <a:ea typeface="Arial" pitchFamily="34" charset="-122"/>
                 <a:cs typeface="Arial" pitchFamily="34" charset="-120"/>
               </a:rPr>
-              <a:t>10 分</a:t>
+              <a:t>8 分</a:t>
             </a:r>
             <a:endParaRPr lang="en-US" sz="2250" dirty="0"/>
           </a:p>
@@ -6063,7 +6063,7 @@
                 <a:ea typeface="Arial" pitchFamily="34" charset="-122"/>
                 <a:cs typeface="Arial" pitchFamily="34" charset="-120"/>
               </a:rPr>
-              <a:t>回顧</a:t>
+              <a:t>回顧 + 補充段落</a:t>
             </a:r>
             <a:endParaRPr lang="en-US" sz="2250" dirty="0"/>
           </a:p>
@@ -6127,7 +6127,7 @@
                 <a:ea typeface="Arial" pitchFamily="34" charset="-122"/>
                 <a:cs typeface="Arial" pitchFamily="34" charset="-120"/>
               </a:rPr>
-              <a:t>修改結果如何協助釐清需求</a:t>
+              <a:t>需求釐清、AI 演進與人的判斷</a:t>
             </a:r>
             <a:endParaRPr lang="en-US" sz="2100" dirty="0"/>
           </a:p>
@@ -6191,7 +6191,7 @@
                 <a:ea typeface="Arial" pitchFamily="34" charset="-122"/>
                 <a:cs typeface="Arial" pitchFamily="34" charset="-120"/>
               </a:rPr>
-              <a:t>5 分</a:t>
+              <a:t>12 分</a:t>
             </a:r>
             <a:endParaRPr lang="en-US" sz="2250" dirty="0"/>
           </a:p>
@@ -6575,7 +6575,7 @@
                 <a:ea typeface="Arial" pitchFamily="34" charset="-122"/>
                 <a:cs typeface="Arial" pitchFamily="34" charset="-120"/>
               </a:rPr>
-              <a:t>15 分</a:t>
+              <a:t>14 分</a:t>
             </a:r>
             <a:endParaRPr lang="en-US" sz="2250" dirty="0"/>
           </a:p>
@@ -6767,7 +6767,7 @@
                 <a:ea typeface="Arial" pitchFamily="34" charset="-122"/>
                 <a:cs typeface="Arial" pitchFamily="34" charset="-120"/>
               </a:rPr>
-              <a:t>20 分</a:t>
+              <a:t>18 分</a:t>
             </a:r>
             <a:endParaRPr lang="en-US" sz="2250" dirty="0"/>
           </a:p>
@@ -7151,7 +7151,7 @@
                 <a:ea typeface="Arial" pitchFamily="34" charset="-122"/>
                 <a:cs typeface="Arial" pitchFamily="34" charset="-120"/>
               </a:rPr>
-              <a:t>25 分</a:t>
+              <a:t>23 分</a:t>
             </a:r>
             <a:endParaRPr lang="en-US" sz="2250" dirty="0"/>
           </a:p>
@@ -8149,7 +8149,7 @@
                 <a:ea typeface="Arial" pitchFamily="34" charset="-122"/>
                 <a:cs typeface="Arial" pitchFamily="34" charset="-120"/>
               </a:rPr>
-              <a:t>Marp 投影片，64 頁，含備忘稿</a:t>
+              <a:t>Marp 投影片，76 頁，含備忘稿</a:t>
             </a:r>
             <a:endParaRPr lang="en-US" sz="2100" dirty="0"/>
           </a:p>
@@ -11181,7 +11181,7 @@
                 <a:ea typeface="Arial" pitchFamily="34" charset="-122"/>
                 <a:cs typeface="Arial" pitchFamily="34" charset="-120"/>
               </a:rPr>
-              <a:t>64</a:t>
+              <a:t>76</a:t>
             </a:r>
             <a:endParaRPr lang="en-US" sz="7200" dirty="0"/>
           </a:p>

--- a/instructor/LLM2Life_slide_deck.pptx
+++ b/instructor/LLM2Life_slide_deck.pptx
@@ -11,6 +11,8 @@
     <p:sldId id="259" r:id="rId5"/>
     <p:sldId id="260" r:id="rId6"/>
     <p:sldId id="261" r:id="rId7"/>
+    <p:sldId id="276" r:id="rId27"/>
+    <p:sldId id="277" r:id="rId28"/>
     <p:sldId id="262" r:id="rId8"/>
     <p:sldId id="263" r:id="rId9"/>
     <p:sldId id="264" r:id="rId10"/>
@@ -11603,6 +11605,894 @@
 </p:sld>
 </file>
 
+<file path=ppt/slides/slide21.xml><?xml version="1.0" encoding="utf-8"?>
+<p:sld xmlns:a="http://schemas.openxmlformats.org/drawingml/2006/main" xmlns:r="http://schemas.openxmlformats.org/officeDocument/2006/relationships" xmlns:p="http://schemas.openxmlformats.org/presentationml/2006/main">
+  <p:cSld name="Slide 7">
+    <p:bg>
+      <p:bgPr>
+        <a:solidFill>
+          <a:srgbClr val="F2F2F3"/>
+        </a:solidFill>
+      </p:bgPr>
+    </p:bg>
+    <p:spTree>
+      <p:nvGrpSpPr>
+        <p:cNvPr id="1" name=""/>
+        <p:cNvGrpSpPr/>
+        <p:nvPr/>
+      </p:nvGrpSpPr>
+      <p:grpSpPr>
+        <a:xfrm>
+          <a:off x="0" y="0"/>
+          <a:ext cx="0" cy="0"/>
+          <a:chOff x="0" y="0"/>
+          <a:chExt cx="0" cy="0"/>
+        </a:xfrm>
+      </p:grpSpPr>
+      <p:sp>
+        <p:nvSpPr>
+          <p:cNvPr id="2" name="Text 0"/>
+          <p:cNvSpPr/>
+          <p:nvPr/>
+        </p:nvSpPr>
+        <p:spPr>
+          <a:xfrm>
+            <a:off x="990600" y="914400"/>
+            <a:ext cx="17937480" cy="392311"/>
+          </a:xfrm>
+          <a:prstGeom prst="rect">
+            <a:avLst/>
+          </a:prstGeom>
+          <a:noFill/>
+          <a:ln/>
+        </p:spPr>
+        <p:txBody>
+          <a:bodyPr wrap="square" lIns="25400" tIns="25400" rIns="25400" bIns="25400" rtlCol="0" anchor="t">
+            <a:normAutofit/>
+          </a:bodyPr>
+          <a:lstStyle/>
+          <a:p>
+            <a:pPr algn="l" indent="0" marL="0">
+              <a:lnSpc>
+                <a:spcPct val="137778"/>
+              </a:lnSpc>
+              <a:buNone/>
+            </a:pPr>
+            <a:r>
+              <a:rPr lang="en-US" sz="1800" spc="252" kern="0" dirty="0">
+                <a:solidFill>
+                  <a:srgbClr val="416180"/>
+                </a:solidFill>
+                <a:latin typeface="Courier New" pitchFamily="34" charset="0"/>
+                <a:ea typeface="Courier New" pitchFamily="34" charset="-122"/>
+                <a:cs typeface="Courier New" pitchFamily="34" charset="-120"/>
+              </a:rPr>
+              <a:t>ARGUMENT</a:t>
+            </a:r>
+            <a:endParaRPr lang="en-US" sz="1800" dirty="0"/>
+          </a:p>
+        </p:txBody>
+      </p:sp>
+      <p:sp>
+        <p:nvSpPr>
+          <p:cNvPr id="3" name="Text 1"/>
+          <p:cNvSpPr/>
+          <p:nvPr/>
+        </p:nvSpPr>
+        <p:spPr>
+          <a:xfrm>
+            <a:off x="990600" y="1440061"/>
+            <a:ext cx="17937480" cy="776436"/>
+          </a:xfrm>
+          <a:prstGeom prst="rect">
+            <a:avLst/>
+          </a:prstGeom>
+          <a:noFill/>
+          <a:ln/>
+        </p:spPr>
+        <p:txBody>
+          <a:bodyPr wrap="square" lIns="25400" tIns="25400" rIns="25400" bIns="25400" rtlCol="0" anchor="t">
+            <a:normAutofit/>
+          </a:bodyPr>
+          <a:lstStyle/>
+          <a:p>
+            <a:pPr algn="l" indent="0" marL="0">
+              <a:lnSpc>
+                <a:spcPct val="99385"/>
+              </a:lnSpc>
+              <a:buNone/>
+            </a:pPr>
+            <a:r>
+              <a:rPr lang="en-US" sz="5100" b="1" spc="-76" kern="0" dirty="0">
+                <a:solidFill>
+                  <a:srgbClr val="1D1F20"/>
+                </a:solidFill>
+                <a:latin typeface="Arial" pitchFamily="34" charset="0"/>
+                <a:ea typeface="Arial" pitchFamily="34" charset="-122"/>
+                <a:cs typeface="Arial" pitchFamily="34" charset="-120"/>
+              </a:rPr>
+              <a:t>補充段落：四個觀點</a:t>
+            </a:r>
+            <a:endParaRPr lang="en-US" sz="5100" dirty="0"/>
+          </a:p>
+        </p:txBody>
+      </p:sp>
+      <p:sp>
+        <p:nvSpPr>
+          <p:cNvPr id="4" name="Shape 2"/>
+          <p:cNvSpPr/>
+          <p:nvPr/>
+        </p:nvSpPr>
+        <p:spPr>
+          <a:xfrm>
+            <a:off x="990600" y="3289846"/>
+            <a:ext cx="3587353" cy="9525"/>
+          </a:xfrm>
+          <a:prstGeom prst="rect">
+            <a:avLst/>
+          </a:prstGeom>
+          <a:solidFill>
+            <a:srgbClr val="1F1F1F">
+              <a:alpha val="16000"/>
+            </a:srgbClr>
+          </a:solidFill>
+          <a:ln/>
+        </p:spPr>
+      </p:sp>
+      <p:sp>
+        <p:nvSpPr>
+          <p:cNvPr id="5" name="Text 3"/>
+          <p:cNvSpPr/>
+          <p:nvPr/>
+        </p:nvSpPr>
+        <p:spPr>
+          <a:xfrm>
+            <a:off x="990600" y="2787997"/>
+            <a:ext cx="3466374" cy="387548"/>
+          </a:xfrm>
+          <a:prstGeom prst="rect">
+            <a:avLst/>
+          </a:prstGeom>
+          <a:noFill/>
+          <a:ln/>
+        </p:spPr>
+        <p:txBody>
+          <a:bodyPr wrap="square" lIns="25400" tIns="25400" rIns="25400" bIns="25400" rtlCol="0" anchor="ctr">
+            <a:normAutofit/>
+          </a:bodyPr>
+          <a:lstStyle/>
+          <a:p>
+            <a:pPr algn="l" indent="0" marL="0">
+              <a:lnSpc>
+                <a:spcPct val="137778"/>
+              </a:lnSpc>
+              <a:buNone/>
+            </a:pPr>
+            <a:r>
+              <a:rPr lang="en-US" sz="1800" spc="180" kern="0" dirty="0">
+                <a:solidFill>
+                  <a:srgbClr val="7A7A7D"/>
+                </a:solidFill>
+                <a:latin typeface="Courier New" pitchFamily="34" charset="0"/>
+                <a:ea typeface="Courier New" pitchFamily="34" charset="-122"/>
+                <a:cs typeface="Courier New" pitchFamily="34" charset="-120"/>
+              </a:rPr>
+              <a:t>觀點</a:t>
+            </a:r>
+            <a:endParaRPr lang="en-US" sz="1800" dirty="0"/>
+          </a:p>
+        </p:txBody>
+      </p:sp>
+      <p:sp>
+        <p:nvSpPr>
+          <p:cNvPr id="6" name="Shape 4"/>
+          <p:cNvSpPr/>
+          <p:nvPr/>
+        </p:nvSpPr>
+        <p:spPr>
+          <a:xfrm>
+            <a:off x="4577953" y="3289846"/>
+            <a:ext cx="12719447" cy="9525"/>
+          </a:xfrm>
+          <a:prstGeom prst="rect">
+            <a:avLst/>
+          </a:prstGeom>
+          <a:solidFill>
+            <a:srgbClr val="1F1F1F">
+              <a:alpha val="16000"/>
+            </a:srgbClr>
+          </a:solidFill>
+          <a:ln/>
+        </p:spPr>
+      </p:sp>
+      <p:sp>
+        <p:nvSpPr>
+          <p:cNvPr id="7" name="Text 5"/>
+          <p:cNvSpPr/>
+          <p:nvPr/>
+        </p:nvSpPr>
+        <p:spPr>
+          <a:xfrm>
+            <a:off x="4577953" y="2787997"/>
+            <a:ext cx="13101030" cy="387548"/>
+          </a:xfrm>
+          <a:prstGeom prst="rect">
+            <a:avLst/>
+          </a:prstGeom>
+          <a:noFill/>
+          <a:ln/>
+        </p:spPr>
+        <p:txBody>
+          <a:bodyPr wrap="square" lIns="25400" tIns="25400" rIns="25400" bIns="25400" rtlCol="0" anchor="ctr">
+            <a:normAutofit/>
+          </a:bodyPr>
+          <a:lstStyle/>
+          <a:p>
+            <a:pPr algn="l" indent="0" marL="0">
+              <a:lnSpc>
+                <a:spcPct val="137778"/>
+              </a:lnSpc>
+              <a:buNone/>
+            </a:pPr>
+            <a:r>
+              <a:rPr lang="en-US" sz="1800" spc="180" kern="0" dirty="0">
+                <a:solidFill>
+                  <a:srgbClr val="7A7A7D"/>
+                </a:solidFill>
+                <a:latin typeface="Courier New" pitchFamily="34" charset="0"/>
+                <a:ea typeface="Courier New" pitchFamily="34" charset="-122"/>
+                <a:cs typeface="Courier New" pitchFamily="34" charset="-120"/>
+              </a:rPr>
+              <a:t>內容</a:t>
+            </a:r>
+            <a:endParaRPr lang="en-US" sz="1800" dirty="0"/>
+          </a:p>
+        </p:txBody>
+      </p:sp>
+      <p:sp>
+        <p:nvSpPr>
+          <p:cNvPr id="8" name="Shape 6"/>
+          <p:cNvSpPr/>
+          <p:nvPr/>
+        </p:nvSpPr>
+        <p:spPr>
+          <a:xfrm>
+            <a:off x="990600" y="4190851"/>
+            <a:ext cx="3587353" cy="9525"/>
+          </a:xfrm>
+          <a:prstGeom prst="rect">
+            <a:avLst/>
+          </a:prstGeom>
+          <a:solidFill>
+            <a:srgbClr val="D6EBFF"/>
+          </a:solidFill>
+          <a:ln/>
+        </p:spPr>
+      </p:sp>
+      <p:sp>
+        <p:nvSpPr>
+          <p:cNvPr id="9" name="Text 7"/>
+          <p:cNvSpPr/>
+          <p:nvPr/>
+        </p:nvSpPr>
+        <p:spPr>
+          <a:xfrm>
+            <a:off x="990600" y="3508921"/>
+            <a:ext cx="3466374" cy="510480"/>
+          </a:xfrm>
+          <a:prstGeom prst="rect">
+            <a:avLst/>
+          </a:prstGeom>
+          <a:noFill/>
+          <a:ln/>
+        </p:spPr>
+        <p:txBody>
+          <a:bodyPr wrap="square" lIns="25400" tIns="25400" rIns="25400" bIns="25400" rtlCol="0" anchor="ctr">
+            <a:normAutofit/>
+          </a:bodyPr>
+          <a:lstStyle/>
+          <a:p>
+            <a:pPr algn="l" indent="0" marL="0">
+              <a:lnSpc>
+                <a:spcPct val="134054"/>
+              </a:lnSpc>
+              <a:buNone/>
+            </a:pPr>
+            <a:r>
+              <a:rPr lang="en-US" sz="2400" dirty="0">
+                <a:solidFill>
+                  <a:srgbClr val="1D1F20"/>
+                </a:solidFill>
+                <a:latin typeface="Arial" pitchFamily="34" charset="0"/>
+                <a:ea typeface="Arial" pitchFamily="34" charset="-122"/>
+                <a:cs typeface="Arial" pitchFamily="34" charset="-120"/>
+              </a:rPr>
+              <a:t>被記錄下來的文明</a:t>
+            </a:r>
+            <a:endParaRPr lang="en-US" sz="2400" dirty="0"/>
+          </a:p>
+        </p:txBody>
+      </p:sp>
+      <p:sp>
+        <p:nvSpPr>
+          <p:cNvPr id="10" name="Shape 8"/>
+          <p:cNvSpPr/>
+          <p:nvPr/>
+        </p:nvSpPr>
+        <p:spPr>
+          <a:xfrm>
+            <a:off x="4577953" y="4190851"/>
+            <a:ext cx="12719447" cy="9525"/>
+          </a:xfrm>
+          <a:prstGeom prst="rect">
+            <a:avLst/>
+          </a:prstGeom>
+          <a:solidFill>
+            <a:srgbClr val="D6EBFF"/>
+          </a:solidFill>
+          <a:ln/>
+        </p:spPr>
+      </p:sp>
+      <p:sp>
+        <p:nvSpPr>
+          <p:cNvPr id="11" name="Text 9"/>
+          <p:cNvSpPr/>
+          <p:nvPr/>
+        </p:nvSpPr>
+        <p:spPr>
+          <a:xfrm>
+            <a:off x="4577953" y="3508921"/>
+            <a:ext cx="13101030" cy="510480"/>
+          </a:xfrm>
+          <a:prstGeom prst="rect">
+            <a:avLst/>
+          </a:prstGeom>
+          <a:noFill/>
+          <a:ln/>
+        </p:spPr>
+        <p:txBody>
+          <a:bodyPr wrap="square" lIns="25400" tIns="25400" rIns="25400" bIns="25400" rtlCol="0" anchor="ctr">
+            <a:normAutofit/>
+          </a:bodyPr>
+          <a:lstStyle/>
+          <a:p>
+            <a:pPr algn="l" indent="0" marL="0">
+              <a:lnSpc>
+                <a:spcPct val="134054"/>
+              </a:lnSpc>
+              <a:buNone/>
+            </a:pPr>
+            <a:r>
+              <a:rPr lang="en-US" sz="2400" dirty="0">
+                <a:solidFill>
+                  <a:srgbClr val="1D1F20"/>
+                </a:solidFill>
+                <a:latin typeface="Arial" pitchFamily="34" charset="0"/>
+                <a:ea typeface="Arial" pitchFamily="34" charset="-122"/>
+                <a:cs typeface="Arial" pitchFamily="34" charset="-120"/>
+              </a:rPr>
+              <a:t>模型強的地方，是人類記錄得最密的地方</a:t>
+            </a:r>
+            <a:endParaRPr lang="en-US" sz="2400" dirty="0"/>
+          </a:p>
+        </p:txBody>
+      </p:sp>
+      <p:sp>
+        <p:nvSpPr>
+          <p:cNvPr id="12" name="Shape 10"/>
+          <p:cNvSpPr/>
+          <p:nvPr/>
+        </p:nvSpPr>
+        <p:spPr>
+          <a:xfrm>
+            <a:off x="990600" y="5091857"/>
+            <a:ext cx="3587353" cy="9525"/>
+          </a:xfrm>
+          <a:prstGeom prst="rect">
+            <a:avLst/>
+          </a:prstGeom>
+          <a:solidFill>
+            <a:srgbClr val="D6EBFF"/>
+          </a:solidFill>
+          <a:ln/>
+        </p:spPr>
+      </p:sp>
+      <p:sp>
+        <p:nvSpPr>
+          <p:cNvPr id="13" name="Text 11"/>
+          <p:cNvSpPr/>
+          <p:nvPr/>
+        </p:nvSpPr>
+        <p:spPr>
+          <a:xfrm>
+            <a:off x="990600" y="4409926"/>
+            <a:ext cx="3466374" cy="510480"/>
+          </a:xfrm>
+          <a:prstGeom prst="rect">
+            <a:avLst/>
+          </a:prstGeom>
+          <a:noFill/>
+          <a:ln/>
+        </p:spPr>
+        <p:txBody>
+          <a:bodyPr wrap="square" lIns="25400" tIns="25400" rIns="25400" bIns="25400" rtlCol="0" anchor="ctr">
+            <a:normAutofit/>
+          </a:bodyPr>
+          <a:lstStyle/>
+          <a:p>
+            <a:pPr algn="l" indent="0" marL="0">
+              <a:lnSpc>
+                <a:spcPct val="134054"/>
+              </a:lnSpc>
+              <a:buNone/>
+            </a:pPr>
+            <a:r>
+              <a:rPr lang="en-US" sz="2400" dirty="0">
+                <a:solidFill>
+                  <a:srgbClr val="1D1F20"/>
+                </a:solidFill>
+                <a:latin typeface="Arial" pitchFamily="34" charset="0"/>
+                <a:ea typeface="Arial" pitchFamily="34" charset="-122"/>
+                <a:cs typeface="Arial" pitchFamily="34" charset="-120"/>
+              </a:rPr>
+              <a:t>程式可以自主閉環</a:t>
+            </a:r>
+            <a:endParaRPr lang="en-US" sz="2400" dirty="0"/>
+          </a:p>
+        </p:txBody>
+      </p:sp>
+      <p:sp>
+        <p:nvSpPr>
+          <p:cNvPr id="14" name="Shape 12"/>
+          <p:cNvSpPr/>
+          <p:nvPr/>
+        </p:nvSpPr>
+        <p:spPr>
+          <a:xfrm>
+            <a:off x="4577953" y="5091857"/>
+            <a:ext cx="12719447" cy="9525"/>
+          </a:xfrm>
+          <a:prstGeom prst="rect">
+            <a:avLst/>
+          </a:prstGeom>
+          <a:solidFill>
+            <a:srgbClr val="D6EBFF"/>
+          </a:solidFill>
+          <a:ln/>
+        </p:spPr>
+      </p:sp>
+      <p:sp>
+        <p:nvSpPr>
+          <p:cNvPr id="15" name="Text 13"/>
+          <p:cNvSpPr/>
+          <p:nvPr/>
+        </p:nvSpPr>
+        <p:spPr>
+          <a:xfrm>
+            <a:off x="4577953" y="4409926"/>
+            <a:ext cx="13101030" cy="510480"/>
+          </a:xfrm>
+          <a:prstGeom prst="rect">
+            <a:avLst/>
+          </a:prstGeom>
+          <a:noFill/>
+          <a:ln/>
+        </p:spPr>
+        <p:txBody>
+          <a:bodyPr wrap="square" lIns="25400" tIns="25400" rIns="25400" bIns="25400" rtlCol="0" anchor="ctr">
+            <a:normAutofit/>
+          </a:bodyPr>
+          <a:lstStyle/>
+          <a:p>
+            <a:pPr algn="l" indent="0" marL="0">
+              <a:lnSpc>
+                <a:spcPct val="134054"/>
+              </a:lnSpc>
+              <a:buNone/>
+            </a:pPr>
+            <a:r>
+              <a:rPr lang="en-US" sz="2400" dirty="0">
+                <a:solidFill>
+                  <a:srgbClr val="1D1F20"/>
+                </a:solidFill>
+                <a:latin typeface="Arial" pitchFamily="34" charset="0"/>
+                <a:ea typeface="Arial" pitchFamily="34" charset="-122"/>
+                <a:cs typeface="Arial" pitchFamily="34" charset="-120"/>
+              </a:rPr>
+              <a:t>產生、執行、讀結果、修正，不需要人介入</a:t>
+            </a:r>
+            <a:endParaRPr lang="en-US" sz="2400" dirty="0"/>
+          </a:p>
+        </p:txBody>
+      </p:sp>
+      <p:sp>
+        <p:nvSpPr>
+          <p:cNvPr id="16" name="Shape 14"/>
+          <p:cNvSpPr/>
+          <p:nvPr/>
+        </p:nvSpPr>
+        <p:spPr>
+          <a:xfrm>
+            <a:off x="990600" y="5992862"/>
+            <a:ext cx="3587353" cy="9525"/>
+          </a:xfrm>
+          <a:prstGeom prst="rect">
+            <a:avLst/>
+          </a:prstGeom>
+          <a:solidFill>
+            <a:srgbClr val="D6EBFF"/>
+          </a:solidFill>
+          <a:ln/>
+        </p:spPr>
+      </p:sp>
+      <p:sp>
+        <p:nvSpPr>
+          <p:cNvPr id="17" name="Text 15"/>
+          <p:cNvSpPr/>
+          <p:nvPr/>
+        </p:nvSpPr>
+        <p:spPr>
+          <a:xfrm>
+            <a:off x="990600" y="5310932"/>
+            <a:ext cx="3466374" cy="510480"/>
+          </a:xfrm>
+          <a:prstGeom prst="rect">
+            <a:avLst/>
+          </a:prstGeom>
+          <a:noFill/>
+          <a:ln/>
+        </p:spPr>
+        <p:txBody>
+          <a:bodyPr wrap="square" lIns="25400" tIns="25400" rIns="25400" bIns="25400" rtlCol="0" anchor="ctr">
+            <a:normAutofit/>
+          </a:bodyPr>
+          <a:lstStyle/>
+          <a:p>
+            <a:pPr algn="l" indent="0" marL="0">
+              <a:lnSpc>
+                <a:spcPct val="134054"/>
+              </a:lnSpc>
+              <a:buNone/>
+            </a:pPr>
+            <a:r>
+              <a:rPr lang="en-US" sz="2400" dirty="0">
+                <a:solidFill>
+                  <a:srgbClr val="1D1F20"/>
+                </a:solidFill>
+                <a:latin typeface="Arial" pitchFamily="34" charset="0"/>
+                <a:ea typeface="Arial" pitchFamily="34" charset="-122"/>
+                <a:cs typeface="Arial" pitchFamily="34" charset="-120"/>
+              </a:rPr>
+              <a:t>物理世界會斷環</a:t>
+            </a:r>
+            <a:endParaRPr lang="en-US" sz="2400" dirty="0"/>
+          </a:p>
+        </p:txBody>
+      </p:sp>
+      <p:sp>
+        <p:nvSpPr>
+          <p:cNvPr id="18" name="Shape 16"/>
+          <p:cNvSpPr/>
+          <p:nvPr/>
+        </p:nvSpPr>
+        <p:spPr>
+          <a:xfrm>
+            <a:off x="4577953" y="5992862"/>
+            <a:ext cx="12719447" cy="9525"/>
+          </a:xfrm>
+          <a:prstGeom prst="rect">
+            <a:avLst/>
+          </a:prstGeom>
+          <a:solidFill>
+            <a:srgbClr val="D6EBFF"/>
+          </a:solidFill>
+          <a:ln/>
+        </p:spPr>
+      </p:sp>
+      <p:sp>
+        <p:nvSpPr>
+          <p:cNvPr id="19" name="Text 17"/>
+          <p:cNvSpPr/>
+          <p:nvPr/>
+        </p:nvSpPr>
+        <p:spPr>
+          <a:xfrm>
+            <a:off x="4577953" y="5310932"/>
+            <a:ext cx="13101030" cy="510480"/>
+          </a:xfrm>
+          <a:prstGeom prst="rect">
+            <a:avLst/>
+          </a:prstGeom>
+          <a:noFill/>
+          <a:ln/>
+        </p:spPr>
+        <p:txBody>
+          <a:bodyPr wrap="square" lIns="25400" tIns="25400" rIns="25400" bIns="25400" rtlCol="0" anchor="ctr">
+            <a:normAutofit/>
+          </a:bodyPr>
+          <a:lstStyle/>
+          <a:p>
+            <a:pPr algn="l" indent="0" marL="0">
+              <a:lnSpc>
+                <a:spcPct val="134054"/>
+              </a:lnSpc>
+              <a:buNone/>
+            </a:pPr>
+            <a:r>
+              <a:rPr lang="en-US" sz="2400" dirty="0">
+                <a:solidFill>
+                  <a:srgbClr val="1D1F20"/>
+                </a:solidFill>
+                <a:latin typeface="Arial" pitchFamily="34" charset="0"/>
+                <a:ea typeface="Arial" pitchFamily="34" charset="-122"/>
+                <a:cs typeface="Arial" pitchFamily="34" charset="-120"/>
+              </a:rPr>
+              <a:t>執行與觀察只能由人接上，回饋因此變慢</a:t>
+            </a:r>
+            <a:endParaRPr lang="en-US" sz="2400" dirty="0"/>
+          </a:p>
+        </p:txBody>
+      </p:sp>
+      <p:sp>
+        <p:nvSpPr>
+          <p:cNvPr id="21" name="Text 19"/>
+          <p:cNvSpPr/>
+          <p:nvPr/>
+        </p:nvSpPr>
+        <p:spPr>
+          <a:xfrm>
+            <a:off x="990600" y="6211937"/>
+            <a:ext cx="3466374" cy="510480"/>
+          </a:xfrm>
+          <a:prstGeom prst="rect">
+            <a:avLst/>
+          </a:prstGeom>
+          <a:noFill/>
+          <a:ln/>
+        </p:spPr>
+        <p:txBody>
+          <a:bodyPr wrap="square" lIns="25400" tIns="25400" rIns="25400" bIns="25400" rtlCol="0" anchor="ctr">
+            <a:normAutofit/>
+          </a:bodyPr>
+          <a:lstStyle/>
+          <a:p>
+            <a:pPr algn="l" indent="0" marL="0">
+              <a:lnSpc>
+                <a:spcPct val="134054"/>
+              </a:lnSpc>
+              <a:buNone/>
+            </a:pPr>
+            <a:r>
+              <a:rPr lang="en-US" sz="2400" dirty="0">
+                <a:solidFill>
+                  <a:srgbClr val="1D1F20"/>
+                </a:solidFill>
+                <a:latin typeface="Arial" pitchFamily="34" charset="0"/>
+                <a:ea typeface="Arial" pitchFamily="34" charset="-122"/>
+                <a:cs typeface="Arial" pitchFamily="34" charset="-120"/>
+              </a:rPr>
+              <a:t>context 造成差異</a:t>
+            </a:r>
+            <a:endParaRPr lang="en-US" sz="2400" dirty="0"/>
+          </a:p>
+        </p:txBody>
+      </p:sp>
+      <p:sp>
+        <p:nvSpPr>
+          <p:cNvPr id="23" name="Text 21"/>
+          <p:cNvSpPr/>
+          <p:nvPr/>
+        </p:nvSpPr>
+        <p:spPr>
+          <a:xfrm>
+            <a:off x="4577953" y="6211937"/>
+            <a:ext cx="13101030" cy="510480"/>
+          </a:xfrm>
+          <a:prstGeom prst="rect">
+            <a:avLst/>
+          </a:prstGeom>
+          <a:noFill/>
+          <a:ln/>
+        </p:spPr>
+        <p:txBody>
+          <a:bodyPr wrap="square" lIns="25400" tIns="25400" rIns="25400" bIns="25400" rtlCol="0" anchor="ctr">
+            <a:normAutofit/>
+          </a:bodyPr>
+          <a:lstStyle/>
+          <a:p>
+            <a:pPr algn="l" indent="0" marL="0">
+              <a:lnSpc>
+                <a:spcPct val="134054"/>
+              </a:lnSpc>
+              <a:buNone/>
+            </a:pPr>
+            <a:r>
+              <a:rPr lang="en-US" sz="2400" dirty="0">
+                <a:solidFill>
+                  <a:srgbClr val="1D1F20"/>
+                </a:solidFill>
+                <a:latin typeface="Arial" pitchFamily="34" charset="0"/>
+                <a:ea typeface="Arial" pitchFamily="34" charset="-122"/>
+                <a:cs typeface="Arial" pitchFamily="34" charset="-120"/>
+              </a:rPr>
+              <a:t>只有你有的經驗與取捨，決定它能做到多準</a:t>
+            </a:r>
+            <a:endParaRPr lang="en-US" sz="2400" dirty="0"/>
+          </a:p>
+        </p:txBody>
+      </p:sp>
+    </p:spTree>
+  </p:cSld>
+  <p:clrMapOvr>
+    <a:masterClrMapping/>
+  </p:clrMapOvr>
+</p:sld>
+</file>
+
+<file path=ppt/slides/slide22.xml><?xml version="1.0" encoding="utf-8"?>
+<p:sld xmlns:a="http://schemas.openxmlformats.org/drawingml/2006/main" xmlns:r="http://schemas.openxmlformats.org/officeDocument/2006/relationships" xmlns:p="http://schemas.openxmlformats.org/presentationml/2006/main">
+  <p:cSld name="Slide 6">
+    <p:bg>
+      <p:bgPr>
+        <a:solidFill>
+          <a:srgbClr val="F2F2F3"/>
+        </a:solidFill>
+      </p:bgPr>
+    </p:bg>
+    <p:spTree>
+      <p:nvGrpSpPr>
+        <p:cNvPr id="1" name=""/>
+        <p:cNvGrpSpPr/>
+        <p:nvPr/>
+      </p:nvGrpSpPr>
+      <p:grpSpPr>
+        <a:xfrm>
+          <a:off x="0" y="0"/>
+          <a:ext cx="0" cy="0"/>
+          <a:chOff x="0" y="0"/>
+          <a:chExt cx="0" cy="0"/>
+        </a:xfrm>
+      </p:grpSpPr>
+      <p:sp>
+        <p:nvSpPr>
+          <p:cNvPr id="2" name="Text 0"/>
+          <p:cNvSpPr/>
+          <p:nvPr/>
+        </p:nvSpPr>
+        <p:spPr>
+          <a:xfrm>
+            <a:off x="990600" y="2838896"/>
+            <a:ext cx="17937480" cy="1409700"/>
+          </a:xfrm>
+          <a:prstGeom prst="rect">
+            <a:avLst/>
+          </a:prstGeom>
+          <a:noFill/>
+          <a:ln/>
+        </p:spPr>
+        <p:txBody>
+          <a:bodyPr wrap="square" lIns="25400" tIns="25400" rIns="25400" bIns="25400" rtlCol="0" anchor="t">
+            <a:normAutofit/>
+          </a:bodyPr>
+          <a:lstStyle/>
+          <a:p>
+            <a:pPr algn="l" indent="0" marL="0">
+              <a:lnSpc>
+                <a:spcPct val="69565"/>
+              </a:lnSpc>
+              <a:buNone/>
+            </a:pPr>
+            <a:r>
+              <a:rPr lang="en-US" sz="13500" dirty="0">
+                <a:solidFill>
+                  <a:srgbClr val="B5D9FD"/>
+                </a:solidFill>
+                <a:latin typeface="Arial" pitchFamily="34" charset="0"/>
+                <a:ea typeface="Arial" pitchFamily="34" charset="-122"/>
+                <a:cs typeface="Arial" pitchFamily="34" charset="-120"/>
+              </a:rPr>
+              <a:t>“</a:t>
+            </a:r>
+            <a:endParaRPr lang="en-US" sz="13500" dirty="0"/>
+          </a:p>
+        </p:txBody>
+      </p:sp>
+      <p:sp>
+        <p:nvSpPr>
+          <p:cNvPr id="3" name="Text 1"/>
+          <p:cNvSpPr/>
+          <p:nvPr/>
+        </p:nvSpPr>
+        <p:spPr>
+          <a:xfrm>
+            <a:off x="990600" y="4705796"/>
+            <a:ext cx="9966342" cy="2083296"/>
+          </a:xfrm>
+          <a:prstGeom prst="rect">
+            <a:avLst/>
+          </a:prstGeom>
+          <a:noFill/>
+          <a:ln/>
+        </p:spPr>
+        <p:txBody>
+          <a:bodyPr wrap="square" lIns="25400" tIns="25400" rIns="25400" bIns="25400" rtlCol="0" anchor="t">
+            <a:normAutofit/>
+          </a:bodyPr>
+          <a:lstStyle/>
+          <a:p>
+            <a:pPr algn="l" indent="0" marL="0">
+              <a:lnSpc>
+                <a:spcPct val="105255"/>
+              </a:lnSpc>
+              <a:buNone/>
+            </a:pPr>
+            <a:r>
+              <a:rPr lang="en-US" sz="5100" dirty="0">
+                <a:solidFill>
+                  <a:srgbClr val="2C455D"/>
+                </a:solidFill>
+                <a:latin typeface="Arial" pitchFamily="34" charset="0"/>
+                <a:ea typeface="Arial" pitchFamily="34" charset="-122"/>
+                <a:cs typeface="Arial" pitchFamily="34" charset="-120"/>
+              </a:rPr>
+              <a:t>能自主驗證的事，會愈來愈快；不能自主驗證的事，仍然靠人。</a:t>
+            </a:r>
+            <a:endParaRPr lang="en-US" sz="5100" dirty="0"/>
+          </a:p>
+        </p:txBody>
+      </p:sp>
+      <p:sp>
+        <p:nvSpPr>
+          <p:cNvPr id="4" name="Text 2"/>
+          <p:cNvSpPr/>
+          <p:nvPr/>
+        </p:nvSpPr>
+        <p:spPr>
+          <a:xfrm>
+            <a:off x="990600" y="7246293"/>
+            <a:ext cx="17937480" cy="392311"/>
+          </a:xfrm>
+          <a:prstGeom prst="rect">
+            <a:avLst/>
+          </a:prstGeom>
+          <a:noFill/>
+          <a:ln/>
+        </p:spPr>
+        <p:txBody>
+          <a:bodyPr wrap="square" lIns="25400" tIns="25400" rIns="25400" bIns="25400" rtlCol="0" anchor="t">
+            <a:normAutofit/>
+          </a:bodyPr>
+          <a:lstStyle/>
+          <a:p>
+            <a:pPr algn="l" indent="0" marL="0">
+              <a:lnSpc>
+                <a:spcPct val="137778"/>
+              </a:lnSpc>
+              <a:buNone/>
+            </a:pPr>
+            <a:r>
+              <a:rPr lang="en-US" sz="1800" spc="216" kern="0" dirty="0">
+                <a:solidFill>
+                  <a:srgbClr val="7A7A7D"/>
+                </a:solidFill>
+                <a:latin typeface="Courier New" pitchFamily="34" charset="0"/>
+                <a:ea typeface="Courier New" pitchFamily="34" charset="-122"/>
+                <a:cs typeface="Courier New" pitchFamily="34" charset="-120"/>
+              </a:rPr>
+              <a:t>instructor/insights.md — 補充段落</a:t>
+            </a:r>
+            <a:endParaRPr lang="en-US" sz="1800" dirty="0"/>
+          </a:p>
+        </p:txBody>
+      </p:sp>
+    </p:spTree>
+  </p:cSld>
+  <p:clrMapOvr>
+    <a:masterClrMapping/>
+  </p:clrMapOvr>
+</p:sld>
+</file>
+
 <file path=ppt/slides/slide3.xml><?xml version="1.0" encoding="utf-8"?>
 <p:sld xmlns:a="http://schemas.openxmlformats.org/drawingml/2006/main" xmlns:r="http://schemas.openxmlformats.org/officeDocument/2006/relationships" xmlns:p="http://schemas.openxmlformats.org/presentationml/2006/main">
   <p:cSld name="Slide 3">

--- a/instructor/LLM2Life_slide_deck.pptx
+++ b/instructor/LLM2Life_slide_deck.pptx
@@ -5113,7 +5113,7 @@
                 <a:ea typeface="Arial" pitchFamily="34" charset="-122"/>
                 <a:cs typeface="Arial" pitchFamily="34" charset="-120"/>
               </a:rPr>
-              <a:t>十二個段落。時間與順序的唯一真實來源是 instructor/timeline.md。</a:t>
+              <a:t>十二個段落。時間與順序的唯一真實來源是 variant-free/instructor/timeline.md。</a:t>
             </a:r>
             <a:endParaRPr lang="en-US" sz="3450" dirty="0"/>
           </a:p>
@@ -5233,7 +5233,7 @@
                 <a:ea typeface="Courier New" pitchFamily="34" charset="-122"/>
                 <a:cs typeface="Courier New" pitchFamily="34" charset="-120"/>
               </a:rPr>
-              <a:t>instructor/timeline.md</a:t>
+              <a:t>variant-free/instructor/timeline.md</a:t>
             </a:r>
             <a:endParaRPr lang="en-US" sz="1800" dirty="0"/>
           </a:p>
@@ -5297,7 +5297,7 @@
                 <a:ea typeface="Arial" pitchFamily="34" charset="-122"/>
                 <a:cs typeface="Arial" pitchFamily="34" charset="-120"/>
               </a:rPr>
-              <a:t>開場 + Demo</a:t>
+              <a:t>開場 + 完整存檔 Demo</a:t>
             </a:r>
             <a:endParaRPr lang="en-US" sz="2250" dirty="0"/>
           </a:p>
@@ -5361,7 +5361,7 @@
                 <a:ea typeface="Arial" pitchFamily="34" charset="-122"/>
                 <a:cs typeface="Arial" pitchFamily="34" charset="-120"/>
               </a:rPr>
-              <a:t>現場三分鐘做出一個東西</a:t>
+              <a:t>現場示範問、貼、存、開</a:t>
             </a:r>
             <a:endParaRPr lang="en-US" sz="2100" dirty="0"/>
           </a:p>
@@ -5489,7 +5489,7 @@
                 <a:ea typeface="Arial" pitchFamily="34" charset="-122"/>
                 <a:cs typeface="Arial" pitchFamily="34" charset="-120"/>
               </a:rPr>
-              <a:t>觀念</a:t>
+              <a:t>三個名詞</a:t>
             </a:r>
             <a:endParaRPr lang="en-US" sz="2250" dirty="0"/>
           </a:p>
@@ -5553,7 +5553,7 @@
                 <a:ea typeface="Arial" pitchFamily="34" charset="-122"/>
                 <a:cs typeface="Arial" pitchFamily="34" charset="-120"/>
               </a:rPr>
-              <a:t>Claude Code / repo / GitHub</a:t>
+              <a:t>claude.ai / repo / GitHub</a:t>
             </a:r>
             <a:endParaRPr lang="en-US" sz="2100" dirty="0"/>
           </a:p>
@@ -5617,7 +5617,7 @@
                 <a:ea typeface="Arial" pitchFamily="34" charset="-122"/>
                 <a:cs typeface="Arial" pitchFamily="34" charset="-120"/>
               </a:rPr>
-              <a:t>8 分</a:t>
+              <a:t>10 分</a:t>
             </a:r>
             <a:endParaRPr lang="en-US" sz="2250" dirty="0"/>
           </a:p>
@@ -5745,7 +5745,7 @@
                 <a:ea typeface="Arial" pitchFamily="34" charset="-122"/>
                 <a:cs typeface="Arial" pitchFamily="34" charset="-120"/>
               </a:rPr>
-              <a:t>環境 + 建 repo + 確認可以上傳</a:t>
+              <a:t>帳號 + 存檔練習</a:t>
             </a:r>
             <a:endParaRPr lang="en-US" sz="2100" dirty="0"/>
           </a:p>
@@ -5809,7 +5809,7 @@
                 <a:ea typeface="Arial" pitchFamily="34" charset="-122"/>
                 <a:cs typeface="Arial" pitchFamily="34" charset="-120"/>
               </a:rPr>
-              <a:t>20 分</a:t>
+              <a:t>25 分</a:t>
             </a:r>
             <a:endParaRPr lang="en-US" sz="2250" dirty="0"/>
           </a:p>
@@ -5937,7 +5937,7 @@
                 <a:ea typeface="Arial" pitchFamily="34" charset="-122"/>
                 <a:cs typeface="Arial" pitchFamily="34" charset="-120"/>
               </a:rPr>
-              <a:t>記帳小工具：描述、修改、驗證</a:t>
+              <a:t>記帳工具：描述、更新、上傳</a:t>
             </a:r>
             <a:endParaRPr lang="en-US" sz="2100" dirty="0"/>
           </a:p>
@@ -6001,7 +6001,7 @@
                 <a:ea typeface="Arial" pitchFamily="34" charset="-122"/>
                 <a:cs typeface="Arial" pitchFamily="34" charset="-120"/>
               </a:rPr>
-              <a:t>25 分</a:t>
+              <a:t>30 分</a:t>
             </a:r>
             <a:endParaRPr lang="en-US" sz="2250" dirty="0"/>
           </a:p>
@@ -6129,7 +6129,7 @@
                 <a:ea typeface="Arial" pitchFamily="34" charset="-122"/>
                 <a:cs typeface="Arial" pitchFamily="34" charset="-120"/>
               </a:rPr>
-              <a:t>需求釐清、AI 演進與人的判斷</a:t>
+              <a:t>兩類工作、AI 演進與人的判斷</a:t>
             </a:r>
             <a:endParaRPr lang="en-US" sz="2100" dirty="0"/>
           </a:p>
@@ -6897,7 +6897,7 @@
                 <a:ea typeface="Arial" pitchFamily="34" charset="-122"/>
                 <a:cs typeface="Arial" pitchFamily="34" charset="-120"/>
               </a:rPr>
-              <a:t>2–4 個可驗收步驟</a:t>
+              <a:t>2–4 個步驟</a:t>
             </a:r>
             <a:endParaRPr lang="en-US" sz="2100" dirty="0"/>
           </a:p>
@@ -7089,7 +7089,7 @@
                 <a:ea typeface="Arial" pitchFamily="34" charset="-122"/>
                 <a:cs typeface="Arial" pitchFamily="34" charset="-120"/>
               </a:rPr>
-              <a:t>完成核心流程並保存版本</a:t>
+              <a:t>完成核心流程並上傳 GitHub</a:t>
             </a:r>
             <a:endParaRPr lang="en-US" sz="2100" dirty="0"/>
           </a:p>
@@ -7153,7 +7153,7 @@
                 <a:ea typeface="Arial" pitchFamily="34" charset="-122"/>
                 <a:cs typeface="Arial" pitchFamily="34" charset="-120"/>
               </a:rPr>
-              <a:t>23 分</a:t>
+              <a:t>30 分</a:t>
             </a:r>
             <a:endParaRPr lang="en-US" sz="2250" dirty="0"/>
           </a:p>
@@ -7281,7 +7281,7 @@
                 <a:ea typeface="Arial" pitchFamily="34" charset="-122"/>
                 <a:cs typeface="Arial" pitchFamily="34" charset="-120"/>
               </a:rPr>
-              <a:t>增加一項功能、驗證並發布</a:t>
+              <a:t>更新版本並重新驗證</a:t>
             </a:r>
             <a:endParaRPr lang="en-US" sz="2100" dirty="0"/>
           </a:p>
@@ -7433,7 +7433,7 @@
                 <a:ea typeface="Arial" pitchFamily="34" charset="-122"/>
                 <a:cs typeface="Arial" pitchFamily="34" charset="-120"/>
               </a:rPr>
-              <a:t>問題、成果、驗證方式與下一步</a:t>
+              <a:t>成果與下一步</a:t>
             </a:r>
             <a:endParaRPr lang="en-US" sz="2100" dirty="0"/>
           </a:p>
@@ -7477,7 +7477,7 @@
                 <a:ea typeface="Arial" pitchFamily="34" charset="-122"/>
                 <a:cs typeface="Arial" pitchFamily="34" charset="-120"/>
               </a:rPr>
-              <a:t>10 分</a:t>
+              <a:t>6 分</a:t>
             </a:r>
             <a:endParaRPr lang="en-US" sz="2250" dirty="0"/>
           </a:p>
@@ -7761,7 +7761,7 @@
                 <a:ea typeface="Arial" pitchFamily="34" charset="-122"/>
                 <a:cs typeface="Arial" pitchFamily="34" charset="-120"/>
               </a:rPr>
-              <a:t>六個資料夾</a:t>
+              <a:t>資料夾與版本</a:t>
             </a:r>
             <a:endParaRPr lang="en-US" sz="5100" dirty="0"/>
           </a:p>
@@ -7893,7 +7893,7 @@
                 <a:ea typeface="Courier New" pitchFamily="34" charset="-122"/>
                 <a:cs typeface="Courier New" pitchFamily="34" charset="-120"/>
               </a:rPr>
-              <a:t>給誰</a:t>
+              <a:t>版本</a:t>
             </a:r>
             <a:endParaRPr lang="en-US" sz="1800" dirty="0"/>
           </a:p>
@@ -8087,7 +8087,7 @@
                 <a:ea typeface="Arial" pitchFamily="34" charset="-122"/>
                 <a:cs typeface="Arial" pitchFamily="34" charset="-120"/>
               </a:rPr>
-              <a:t>講師</a:t>
+              <a:t>付費版</a:t>
             </a:r>
             <a:endParaRPr lang="en-US" sz="2100" dirty="0"/>
           </a:p>
@@ -8151,7 +8151,7 @@
                 <a:ea typeface="Arial" pitchFamily="34" charset="-122"/>
                 <a:cs typeface="Arial" pitchFamily="34" charset="-120"/>
               </a:rPr>
-              <a:t>Marp 投影片，76 頁，含備忘稿</a:t>
+              <a:t>Marp 投影片，76 頁（免費版 77 頁）</a:t>
             </a:r>
             <a:endParaRPr lang="en-US" sz="2100" dirty="0"/>
           </a:p>
@@ -8279,7 +8279,7 @@
                 <a:ea typeface="Arial" pitchFamily="34" charset="-122"/>
                 <a:cs typeface="Arial" pitchFamily="34" charset="-120"/>
               </a:rPr>
-              <a:t>學員</a:t>
+              <a:t>付費版</a:t>
             </a:r>
             <a:endParaRPr lang="en-US" sz="2100" dirty="0"/>
           </a:p>
@@ -8471,7 +8471,7 @@
                 <a:ea typeface="Arial" pitchFamily="34" charset="-122"/>
                 <a:cs typeface="Arial" pitchFamily="34" charset="-120"/>
               </a:rPr>
-              <a:t>學員</a:t>
+              <a:t>付費版</a:t>
             </a:r>
             <a:endParaRPr lang="en-US" sz="2100" dirty="0"/>
           </a:p>
@@ -8535,7 +8535,7 @@
                 <a:ea typeface="Arial" pitchFamily="34" charset="-122"/>
                 <a:cs typeface="Arial" pitchFamily="34" charset="-120"/>
               </a:rPr>
-              <a:t>隨堂網站原始檔</a:t>
+              <a:t>隨堂網站與課前準備網頁原始檔</a:t>
             </a:r>
             <a:endParaRPr lang="en-US" sz="2100" dirty="0"/>
           </a:p>
@@ -8663,7 +8663,7 @@
                 <a:ea typeface="Arial" pitchFamily="34" charset="-122"/>
                 <a:cs typeface="Arial" pitchFamily="34" charset="-120"/>
               </a:rPr>
-              <a:t>講師</a:t>
+              <a:t>付費版</a:t>
             </a:r>
             <a:endParaRPr lang="en-US" sz="2100" dirty="0"/>
           </a:p>
@@ -8855,7 +8855,7 @@
                 <a:ea typeface="Arial" pitchFamily="34" charset="-122"/>
                 <a:cs typeface="Arial" pitchFamily="34" charset="-120"/>
               </a:rPr>
-              <a:t>選配</a:t>
+              <a:t>兩版共用</a:t>
             </a:r>
             <a:endParaRPr lang="en-US" sz="2100" dirty="0"/>
           </a:p>
@@ -9007,7 +9007,7 @@
                 <a:ea typeface="Arial" pitchFamily="34" charset="-122"/>
                 <a:cs typeface="Arial" pitchFamily="34" charset="-120"/>
               </a:rPr>
-              <a:t>講師</a:t>
+              <a:t>免費版 · 主線</a:t>
             </a:r>
             <a:endParaRPr lang="en-US" sz="2100" dirty="0"/>
           </a:p>
@@ -9051,7 +9051,7 @@
                 <a:ea typeface="Arial" pitchFamily="34" charset="-122"/>
                 <a:cs typeface="Arial" pitchFamily="34" charset="-120"/>
               </a:rPr>
-              <a:t>免費變體的完整教材，自成一套</a:t>
+              <a:t>課堂主線。slides/workbook/site/instructor 自成一套</a:t>
             </a:r>
             <a:endParaRPr lang="en-US" sz="2100" dirty="0"/>
           </a:p>
@@ -9171,7 +9171,7 @@
                 <a:ea typeface="Arial" pitchFamily="34" charset="-122"/>
                 <a:cs typeface="Arial" pitchFamily="34" charset="-120"/>
               </a:rPr>
-              <a:t>免費變體</a:t>
+              <a:t>兩個版本</a:t>
             </a:r>
             <a:endParaRPr lang="en-US" sz="5100" dirty="0"/>
           </a:p>
@@ -9261,7 +9261,7 @@
                 <a:ea typeface="Courier New" pitchFamily="34" charset="-122"/>
                 <a:cs typeface="Courier New" pitchFamily="34" charset="-120"/>
               </a:rPr>
-              <a:t>付費版 · 主線</a:t>
+              <a:t>免費版 · 主線</a:t>
             </a:r>
             <a:endParaRPr lang="en-US" sz="1800" dirty="0"/>
           </a:p>
@@ -9305,7 +9305,7 @@
                 <a:ea typeface="Arial" pitchFamily="34" charset="-122"/>
                 <a:cs typeface="Arial" pitchFamily="34" charset="-120"/>
               </a:rPr>
-              <a:t>桌面版 Claude Code</a:t>
+              <a:t>聊天介面 + GitHub 網頁</a:t>
             </a:r>
             <a:endParaRPr lang="en-US" sz="3300" dirty="0"/>
           </a:p>
@@ -9349,7 +9349,7 @@
                 <a:ea typeface="Arial" pitchFamily="34" charset="-122"/>
                 <a:cs typeface="Arial" pitchFamily="34" charset="-120"/>
               </a:rPr>
-              <a:t>內建 Claude Code，不用裝 Node.js、不碰指令列，還有視覺化的 diff。</a:t>
+              <a:t>免費帳號即可，不必訂閱、不必安裝。學員自行把回覆存成檔案，總長 195 分鐘。</a:t>
             </a:r>
             <a:endParaRPr lang="en-US" sz="1950" dirty="0"/>
           </a:p>
@@ -9417,7 +9417,7 @@
                 <a:ea typeface="Courier New" pitchFamily="34" charset="-122"/>
                 <a:cs typeface="Courier New" pitchFamily="34" charset="-120"/>
               </a:rPr>
-              <a:t>免費版 · variant-free/</a:t>
+              <a:t>付費版 · 根目錄</a:t>
             </a:r>
             <a:endParaRPr lang="en-US" sz="1800" dirty="0"/>
           </a:p>
@@ -9461,7 +9461,7 @@
                 <a:ea typeface="Arial" pitchFamily="34" charset="-122"/>
                 <a:cs typeface="Arial" pitchFamily="34" charset="-120"/>
               </a:rPr>
-              <a:t>聊天介面 + GitHub 網頁</a:t>
+              <a:t>桌面版 Claude Code</a:t>
             </a:r>
             <a:endParaRPr lang="en-US" sz="3300" dirty="0"/>
           </a:p>
@@ -9505,7 +9505,7 @@
                 <a:ea typeface="Arial" pitchFamily="34" charset="-122"/>
                 <a:cs typeface="Arial" pitchFamily="34" charset="-120"/>
               </a:rPr>
-              <a:t>相同的開放式專題架構。適用於沒有付費方案、場地限制安裝軟體或沒有工具預算的場次。</a:t>
+              <a:t>相同的開放式專題架構與成果。適用於主辦方統一付費或學員已有 Pro 以上方案的場次。</a:t>
             </a:r>
             <a:endParaRPr lang="en-US" sz="1950" dirty="0"/>
           </a:p>
@@ -9779,7 +9779,7 @@
                 <a:ea typeface="Arial" pitchFamily="34" charset="-122"/>
                 <a:cs typeface="Arial" pitchFamily="34" charset="-120"/>
               </a:rPr>
-              <a:t>Claude Code 需要付費方案</a:t>
+              <a:t>學員只需要免費帳號</a:t>
             </a:r>
             <a:endParaRPr lang="en-US" sz="3000" dirty="0"/>
           </a:p>
@@ -9823,7 +9823,7 @@
                 <a:ea typeface="Arial" pitchFamily="34" charset="-122"/>
                 <a:cs typeface="Arial" pitchFamily="34" charset="-120"/>
               </a:rPr>
-              <a:t>Pro / Max / Team / Enterprise。免費帳號無法使用。</a:t>
+              <a:t>claude.ai 與 GitHub 免費方案即可，不必訂閱、不必安裝。</a:t>
             </a:r>
             <a:endParaRPr lang="en-US" sz="1950" dirty="0"/>
           </a:p>
@@ -9911,7 +9911,7 @@
                 <a:ea typeface="Arial" pitchFamily="34" charset="-122"/>
                 <a:cs typeface="Arial" pitchFamily="34" charset="-120"/>
               </a:rPr>
-              <a:t>主要路線是桌面版</a:t>
+              <a:t>學員要自己把回覆存成檔案</a:t>
             </a:r>
             <a:endParaRPr lang="en-US" sz="3000" dirty="0"/>
           </a:p>
@@ -9955,7 +9955,7 @@
                 <a:ea typeface="Arial" pitchFamily="34" charset="-122"/>
                 <a:cs typeface="Arial" pitchFamily="34" charset="-120"/>
               </a:rPr>
-              <a:t>不是終端機。瀏覽器版是無法安裝時的備用路線。</a:t>
+              <a:t>所以每個提示詞結尾都要寫「請給我完整程式碼」。</a:t>
             </a:r>
             <a:endParaRPr lang="en-US" sz="1950" dirty="0"/>
           </a:p>
@@ -10219,7 +10219,7 @@
                 <a:ea typeface="Arial" pitchFamily="34" charset="-122"/>
                 <a:cs typeface="Arial" pitchFamily="34" charset="-120"/>
               </a:rPr>
-              <a:t>否則課程前段可能需要處理安裝與帳號問題。</a:t>
+              <a:t>否則課程前段可能需要處理帳號與登入問題。</a:t>
             </a:r>
             <a:endParaRPr lang="en-US" sz="1950" dirty="0"/>
           </a:p>
@@ -10469,7 +10469,7 @@
                 <a:ea typeface="Arial" pitchFamily="34" charset="-122"/>
                 <a:cs typeface="Arial" pitchFamily="34" charset="-120"/>
               </a:rPr>
-              <a:t>先改 instructor/timeline.md，再往下同步</a:t>
+              <a:t>先改該版本的 timeline.md，再往下同步</a:t>
             </a:r>
             <a:endParaRPr lang="en-US" sz="2400" dirty="0"/>
           </a:p>
@@ -10577,7 +10577,7 @@
                 <a:ea typeface="Arial" pitchFamily="34" charset="-122"/>
                 <a:cs typeface="Arial" pitchFamily="34" charset="-120"/>
               </a:rPr>
-              <a:t>workbook/ 和 site/index.html 必須逐字一致</a:t>
+              <a:t>同一版本的 workbook/ 和 site/index.html 必須逐字一致</a:t>
             </a:r>
             <a:endParaRPr lang="en-US" sz="2400" dirty="0"/>
           </a:p>
@@ -10685,7 +10685,7 @@
                 <a:ea typeface="Arial" pitchFamily="34" charset="-122"/>
                 <a:cs typeface="Arial" pitchFamily="34" charset="-120"/>
               </a:rPr>
-              <a:t>重新發布到原本那個網址，不要產生新的</a:t>
+              <a:t>各自回到自己原本的網址，兩個網址不互換</a:t>
             </a:r>
             <a:endParaRPr lang="en-US" sz="2400" dirty="0"/>
           </a:p>
@@ -10729,7 +10729,7 @@
                 <a:ea typeface="Arial" pitchFamily="34" charset="-122"/>
                 <a:cs typeface="Arial" pitchFamily="34" charset="-120"/>
               </a:rPr>
-              <a:t>改完付費版 Lab</a:t>
+              <a:t>改完任一版 Lab</a:t>
             </a:r>
             <a:endParaRPr lang="en-US" sz="2700" dirty="0"/>
           </a:p>
@@ -10773,7 +10773,7 @@
                 <a:ea typeface="Arial" pitchFamily="34" charset="-122"/>
                 <a:cs typeface="Arial" pitchFamily="34" charset="-120"/>
               </a:rPr>
-              <a:t>variant-free/ 通常要跟著改，但提示詞不必逐字一致</a:t>
+              <a:t>另一版通常要跟著改，但提示詞不必逐字一致</a:t>
             </a:r>
             <a:endParaRPr lang="en-US" sz="2400" dirty="0"/>
           </a:p>
@@ -10959,7 +10959,7 @@
                 <a:ea typeface="Arial" pitchFamily="34" charset="-122"/>
                 <a:cs typeface="Arial" pitchFamily="34" charset="-120"/>
               </a:rPr>
-              <a:t>學員用自己的 GitHub 帳號和 Claude 帳號，逐步完成發想、規劃、實作與驗證，最後展示一個可操作的最小版本。</a:t>
+              <a:t>學員用自己的 GitHub 帳號和免費 Claude 帳號，逐步完成發想、規劃、實作與驗證，最後展示一個可操作的最小版本。</a:t>
             </a:r>
             <a:endParaRPr lang="en-US" sz="2400" dirty="0"/>
           </a:p>
@@ -11027,7 +11027,7 @@
                 <a:ea typeface="Arial" pitchFamily="34" charset="-122"/>
                 <a:cs typeface="Arial" pitchFamily="34" charset="-120"/>
               </a:rPr>
-              <a:t>3</a:t>
+              <a:t>195</a:t>
             </a:r>
             <a:endParaRPr lang="en-US" sz="7200" dirty="0"/>
           </a:p>
@@ -11071,7 +11071,7 @@
                 <a:ea typeface="Arial" pitchFamily="34" charset="-122"/>
                 <a:cs typeface="Arial" pitchFamily="34" charset="-120"/>
               </a:rPr>
-              <a:t>小時</a:t>
+              <a:t>分鐘</a:t>
             </a:r>
             <a:endParaRPr lang="en-US" sz="3450" dirty="0"/>
           </a:p>
@@ -11115,7 +11115,7 @@
                 <a:ea typeface="Arial" pitchFamily="34" charset="-122"/>
                 <a:cs typeface="Arial" pitchFamily="34" charset="-120"/>
               </a:rPr>
-              <a:t>含休息，單場完成</a:t>
+              <a:t>含休息，可縮短為 180</a:t>
             </a:r>
             <a:endParaRPr lang="en-US" sz="1950" dirty="0"/>
           </a:p>
@@ -11183,7 +11183,7 @@
                 <a:ea typeface="Arial" pitchFamily="34" charset="-122"/>
                 <a:cs typeface="Arial" pitchFamily="34" charset="-120"/>
               </a:rPr>
-              <a:t>76</a:t>
+              <a:t>77</a:t>
             </a:r>
             <a:endParaRPr lang="en-US" sz="7200" dirty="0"/>
           </a:p>
@@ -11271,7 +11271,7 @@
                 <a:ea typeface="Arial" pitchFamily="34" charset="-122"/>
                 <a:cs typeface="Arial" pitchFamily="34" charset="-120"/>
               </a:rPr>
-              <a:t>Marp，含備忘稿</a:t>
+              <a:t>免費版主線，含備忘稿</a:t>
             </a:r>
             <a:endParaRPr lang="en-US" sz="1950" dirty="0"/>
           </a:p>
@@ -11427,7 +11427,7 @@
                 <a:ea typeface="Arial" pitchFamily="34" charset="-122"/>
                 <a:cs typeface="Arial" pitchFamily="34" charset="-120"/>
               </a:rPr>
-              <a:t>講師、學員與免費變體</a:t>
+              <a:t>免費版主線、付費版與共用</a:t>
             </a:r>
             <a:endParaRPr lang="en-US" sz="1950" dirty="0"/>
           </a:p>

--- a/instructor/LLM2Life_slide_deck.pptx
+++ b/instructor/LLM2Life_slide_deck.pptx
@@ -5937,7 +5937,7 @@
                 <a:ea typeface="Arial" pitchFamily="34" charset="-122"/>
                 <a:cs typeface="Arial" pitchFamily="34" charset="-120"/>
               </a:rPr>
-              <a:t>記帳工具：描述、更新、上傳</a:t>
+              <a:t>探究提問卡：描述、更新、上傳</a:t>
             </a:r>
             <a:endParaRPr lang="en-US" sz="2100" dirty="0"/>
           </a:p>
@@ -15266,7 +15266,7 @@
                 <a:ea typeface="Arial" pitchFamily="34" charset="-122"/>
                 <a:cs typeface="Arial" pitchFamily="34" charset="-120"/>
               </a:rPr>
-              <a:t>共同練習：記帳小工具</a:t>
+              <a:t>共同練習：探究提問卡</a:t>
             </a:r>
             <a:endParaRPr lang="en-US" sz="3450" dirty="0"/>
           </a:p>

--- a/instructor/LLM2Life_slide_deck.pptx
+++ b/instructor/LLM2Life_slide_deck.pptx
@@ -7,6 +7,7 @@
   <p:sldIdLst>
     <p:sldId id="256" r:id="rId2"/>
     <p:sldId id="257" r:id="rId3"/>
+    <p:sldId id="278" r:id="rId29"/>
     <p:sldId id="258" r:id="rId4"/>
     <p:sldId id="259" r:id="rId5"/>
     <p:sldId id="260" r:id="rId6"/>
@@ -17,6 +18,7 @@
     <p:sldId id="263" r:id="rId9"/>
     <p:sldId id="264" r:id="rId10"/>
     <p:sldId id="265" r:id="rId11"/>
+    <p:sldId id="279" r:id="rId30"/>
     <p:sldId id="266" r:id="rId12"/>
     <p:sldId id="267" r:id="rId13"/>
     <p:sldId id="268" r:id="rId14"/>
@@ -2650,7 +2652,7 @@
                 <a:ea typeface="Arial" pitchFamily="34" charset="-122"/>
                 <a:cs typeface="Arial" pitchFamily="34" charset="-120"/>
               </a:rPr>
-              <a:t>用 Claude Code 把發想做成可操作工具</a:t>
+              <a:t>用 AI 和 GitHub 把發想做成可操作工具</a:t>
             </a:r>
             <a:endParaRPr lang="en-US" sz="7800" dirty="0"/>
           </a:p>
@@ -2806,7 +2808,7 @@
                 <a:ea typeface="Arial" pitchFamily="34" charset="-122"/>
                 <a:cs typeface="Arial" pitchFamily="34" charset="-120"/>
               </a:rPr>
-              <a:t>沒有程式背景的一般人</a:t>
+              <a:t>高中教師（種子教師）</a:t>
             </a:r>
             <a:endParaRPr lang="en-US" sz="2400" dirty="0"/>
           </a:p>
@@ -11183,7 +11185,7 @@
                 <a:ea typeface="Arial" pitchFamily="34" charset="-122"/>
                 <a:cs typeface="Arial" pitchFamily="34" charset="-120"/>
               </a:rPr>
-              <a:t>77</a:t>
+              <a:t>78</a:t>
             </a:r>
             <a:endParaRPr lang="en-US" sz="7200" dirty="0"/>
           </a:p>
@@ -12482,6 +12484,1484 @@
               <a:t>instructor/insights.md — 補充段落</a:t>
             </a:r>
             <a:endParaRPr lang="en-US" sz="1800" dirty="0"/>
+          </a:p>
+        </p:txBody>
+      </p:sp>
+    </p:spTree>
+  </p:cSld>
+  <p:clrMapOvr>
+    <a:masterClrMapping/>
+  </p:clrMapOvr>
+</p:sld>
+</file>
+
+<file path=ppt/slides/slide23.xml><?xml version="1.0" encoding="utf-8"?>
+<p:sld xmlns:a="http://schemas.openxmlformats.org/drawingml/2006/main" xmlns:r="http://schemas.openxmlformats.org/officeDocument/2006/relationships" xmlns:p="http://schemas.openxmlformats.org/presentationml/2006/main">
+  <p:cSld name="Slide 17">
+    <p:bg>
+      <p:bgPr>
+        <a:solidFill>
+          <a:srgbClr val="F2F2F3"/>
+        </a:solidFill>
+      </p:bgPr>
+    </p:bg>
+    <p:spTree>
+      <p:nvGrpSpPr>
+        <p:cNvPr id="1" name=""/>
+        <p:cNvGrpSpPr/>
+        <p:nvPr/>
+      </p:nvGrpSpPr>
+      <p:grpSpPr>
+        <a:xfrm>
+          <a:off x="0" y="0"/>
+          <a:ext cx="0" cy="0"/>
+          <a:chOff x="0" y="0"/>
+          <a:chExt cx="0" cy="0"/>
+        </a:xfrm>
+      </p:grpSpPr>
+      <p:sp>
+        <p:nvSpPr>
+          <p:cNvPr id="2" name="Text 0"/>
+          <p:cNvSpPr/>
+          <p:nvPr/>
+        </p:nvSpPr>
+        <p:spPr>
+          <a:xfrm>
+            <a:off x="990600" y="914400"/>
+            <a:ext cx="17937480" cy="392311"/>
+          </a:xfrm>
+          <a:prstGeom prst="rect">
+            <a:avLst/>
+          </a:prstGeom>
+          <a:noFill/>
+          <a:ln/>
+        </p:spPr>
+        <p:txBody>
+          <a:bodyPr wrap="square" lIns="25400" tIns="25400" rIns="25400" bIns="25400" rtlCol="0" anchor="t">
+            <a:normAutofit/>
+          </a:bodyPr>
+          <a:lstStyle/>
+          <a:p>
+            <a:pPr algn="l" indent="0" marL="0">
+              <a:lnSpc>
+                <a:spcPct val="137778"/>
+              </a:lnSpc>
+              <a:buNone/>
+            </a:pPr>
+            <a:r>
+              <a:rPr lang="en-US" sz="1800" spc="252" kern="0" dirty="0">
+                <a:solidFill>
+                  <a:srgbClr val="416180"/>
+                </a:solidFill>
+                <a:latin typeface="Courier New" pitchFamily="34" charset="0"/>
+                <a:ea typeface="Courier New" pitchFamily="34" charset="-122"/>
+                <a:cs typeface="Courier New" pitchFamily="34" charset="-120"/>
+              </a:rPr>
+              <a:t>AUDIENCE</a:t>
+            </a:r>
+            <a:endParaRPr lang="en-US" sz="1800" dirty="0"/>
+          </a:p>
+        </p:txBody>
+      </p:sp>
+      <p:sp>
+        <p:nvSpPr>
+          <p:cNvPr id="3" name="Text 1"/>
+          <p:cNvSpPr/>
+          <p:nvPr/>
+        </p:nvSpPr>
+        <p:spPr>
+          <a:xfrm>
+            <a:off x="990600" y="1440061"/>
+            <a:ext cx="17937480" cy="776436"/>
+          </a:xfrm>
+          <a:prstGeom prst="rect">
+            <a:avLst/>
+          </a:prstGeom>
+          <a:noFill/>
+          <a:ln/>
+        </p:spPr>
+        <p:txBody>
+          <a:bodyPr wrap="square" lIns="25400" tIns="25400" rIns="25400" bIns="25400" rtlCol="0" anchor="t">
+            <a:normAutofit/>
+          </a:bodyPr>
+          <a:lstStyle/>
+          <a:p>
+            <a:pPr algn="l" indent="0" marL="0">
+              <a:lnSpc>
+                <a:spcPct val="99385"/>
+              </a:lnSpc>
+              <a:buNone/>
+            </a:pPr>
+            <a:r>
+              <a:rPr lang="en-US" sz="5100" b="1" spc="-76" kern="0" dirty="0">
+                <a:solidFill>
+                  <a:srgbClr val="1D1F20"/>
+                </a:solidFill>
+                <a:latin typeface="Arial" pitchFamily="34" charset="0"/>
+                <a:ea typeface="Arial" pitchFamily="34" charset="-122"/>
+                <a:cs typeface="Arial" pitchFamily="34" charset="-120"/>
+              </a:rPr>
+              <a:t>對象與兩個回收路徑</a:t>
+            </a:r>
+            <a:endParaRPr lang="en-US" sz="5100" dirty="0"/>
+          </a:p>
+        </p:txBody>
+      </p:sp>
+      <p:sp>
+        <p:nvSpPr>
+          <p:cNvPr id="4" name="Shape 2"/>
+          <p:cNvSpPr/>
+          <p:nvPr/>
+        </p:nvSpPr>
+        <p:spPr>
+          <a:xfrm>
+            <a:off x="990600" y="2635597"/>
+            <a:ext cx="16306800" cy="9525"/>
+          </a:xfrm>
+          <a:prstGeom prst="rect">
+            <a:avLst/>
+          </a:prstGeom>
+          <a:solidFill>
+            <a:srgbClr val="1F1F1F">
+              <a:alpha val="16000"/>
+            </a:srgbClr>
+          </a:solidFill>
+          <a:ln/>
+        </p:spPr>
+      </p:sp>
+      <p:sp>
+        <p:nvSpPr>
+          <p:cNvPr id="5" name="Shape 3"/>
+          <p:cNvSpPr/>
+          <p:nvPr/>
+        </p:nvSpPr>
+        <p:spPr>
+          <a:xfrm>
+            <a:off x="990600" y="3102322"/>
+            <a:ext cx="7886700" cy="2819846"/>
+          </a:xfrm>
+          <a:prstGeom prst="rect">
+            <a:avLst/>
+          </a:prstGeom>
+          <a:ln w="9525">
+            <a:solidFill>
+              <a:srgbClr val="1F1F1F">
+                <a:alpha val="16000"/>
+              </a:srgbClr>
+            </a:solidFill>
+            <a:prstDash val="solid"/>
+          </a:ln>
+        </p:spPr>
+      </p:sp>
+      <p:sp>
+        <p:nvSpPr>
+          <p:cNvPr id="6" name="Text 4"/>
+          <p:cNvSpPr/>
+          <p:nvPr/>
+        </p:nvSpPr>
+        <p:spPr>
+          <a:xfrm>
+            <a:off x="1343025" y="3492847"/>
+            <a:ext cx="7900035" cy="392311"/>
+          </a:xfrm>
+          <a:prstGeom prst="rect">
+            <a:avLst/>
+          </a:prstGeom>
+          <a:noFill/>
+          <a:ln/>
+        </p:spPr>
+        <p:txBody>
+          <a:bodyPr wrap="square" lIns="25400" tIns="25400" rIns="25400" bIns="25400" rtlCol="0" anchor="t">
+            <a:normAutofit/>
+          </a:bodyPr>
+          <a:lstStyle/>
+          <a:p>
+            <a:pPr algn="l" indent="0" marL="0">
+              <a:lnSpc>
+                <a:spcPct val="137778"/>
+              </a:lnSpc>
+              <a:buNone/>
+            </a:pPr>
+            <a:r>
+              <a:rPr lang="en-US" sz="1800" spc="216" kern="0" dirty="0">
+                <a:solidFill>
+                  <a:srgbClr val="416180"/>
+                </a:solidFill>
+                <a:latin typeface="Courier New" pitchFamily="34" charset="0"/>
+                <a:ea typeface="Courier New" pitchFamily="34" charset="-122"/>
+                <a:cs typeface="Courier New" pitchFamily="34" charset="-120"/>
+              </a:rPr>
+              <a:t>回收路徑 1</a:t>
+            </a:r>
+            <a:endParaRPr lang="en-US" sz="1800" dirty="0"/>
+          </a:p>
+        </p:txBody>
+      </p:sp>
+      <p:sp>
+        <p:nvSpPr>
+          <p:cNvPr id="7" name="Text 5"/>
+          <p:cNvSpPr/>
+          <p:nvPr/>
+        </p:nvSpPr>
+        <p:spPr>
+          <a:xfrm>
+            <a:off x="1343025" y="4037558"/>
+            <a:ext cx="7900035" cy="549325"/>
+          </a:xfrm>
+          <a:prstGeom prst="rect">
+            <a:avLst/>
+          </a:prstGeom>
+          <a:noFill/>
+          <a:ln/>
+        </p:spPr>
+        <p:txBody>
+          <a:bodyPr wrap="square" lIns="25400" tIns="25400" rIns="25400" bIns="25400" rtlCol="0" anchor="t">
+            <a:normAutofit/>
+          </a:bodyPr>
+          <a:lstStyle/>
+          <a:p>
+            <a:pPr algn="l" indent="0" marL="0">
+              <a:lnSpc>
+                <a:spcPct val="107360"/>
+              </a:lnSpc>
+              <a:buNone/>
+            </a:pPr>
+            <a:r>
+              <a:rPr lang="en-US" sz="3300" b="1" spc="-49" kern="0" dirty="0">
+                <a:solidFill>
+                  <a:srgbClr val="1D1F20"/>
+                </a:solidFill>
+                <a:latin typeface="Arial" pitchFamily="34" charset="0"/>
+                <a:ea typeface="Arial" pitchFamily="34" charset="-122"/>
+                <a:cs typeface="Arial" pitchFamily="34" charset="-120"/>
+              </a:rPr>
+              <a:t>回校開給其他老師</a:t>
+            </a:r>
+            <a:endParaRPr lang="en-US" sz="3300" dirty="0"/>
+          </a:p>
+        </p:txBody>
+      </p:sp>
+      <p:sp>
+        <p:nvSpPr>
+          <p:cNvPr id="8" name="Text 6"/>
+          <p:cNvSpPr/>
+          <p:nvPr/>
+        </p:nvSpPr>
+        <p:spPr>
+          <a:xfrm>
+            <a:off x="1343025" y="4739283"/>
+            <a:ext cx="7397306" cy="830461"/>
+          </a:xfrm>
+          <a:prstGeom prst="rect">
+            <a:avLst/>
+          </a:prstGeom>
+          <a:noFill/>
+          <a:ln/>
+        </p:spPr>
+        <p:txBody>
+          <a:bodyPr wrap="square" lIns="25400" tIns="25400" rIns="25400" bIns="25400" rtlCol="0" anchor="t">
+            <a:normAutofit/>
+          </a:bodyPr>
+          <a:lstStyle/>
+          <a:p>
+            <a:pPr algn="l" indent="0" marL="0">
+              <a:lnSpc>
+                <a:spcPct val="134194"/>
+              </a:lnSpc>
+              <a:buNone/>
+            </a:pPr>
+            <a:r>
+              <a:rPr lang="en-US" sz="1950" dirty="0">
+                <a:solidFill>
+                  <a:srgbClr val="5D5D60"/>
+                </a:solidFill>
+                <a:latin typeface="Arial" pitchFamily="34" charset="0"/>
+                <a:ea typeface="Arial" pitchFamily="34" charset="-122"/>
+                <a:cs typeface="Arial" pitchFamily="34" charset="-120"/>
+              </a:rPr>
+              <a:t>講師文件是交付物的一部分，不是後台資料。教材以 CC BY 4.0 授權，可改編與再散布。</a:t>
+            </a:r>
+            <a:endParaRPr lang="en-US" sz="1950" dirty="0"/>
+          </a:p>
+        </p:txBody>
+      </p:sp>
+      <p:sp>
+        <p:nvSpPr>
+          <p:cNvPr id="9" name="Shape 7"/>
+          <p:cNvSpPr/>
+          <p:nvPr/>
+        </p:nvSpPr>
+        <p:spPr>
+          <a:xfrm>
+            <a:off x="9410700" y="3102322"/>
+            <a:ext cx="7886700" cy="2819846"/>
+          </a:xfrm>
+          <a:prstGeom prst="rect">
+            <a:avLst/>
+          </a:prstGeom>
+          <a:ln w="9525">
+            <a:solidFill>
+              <a:srgbClr val="1F1F1F">
+                <a:alpha val="16000"/>
+              </a:srgbClr>
+            </a:solidFill>
+            <a:prstDash val="solid"/>
+          </a:ln>
+        </p:spPr>
+      </p:sp>
+      <p:sp>
+        <p:nvSpPr>
+          <p:cNvPr id="10" name="Text 8"/>
+          <p:cNvSpPr/>
+          <p:nvPr/>
+        </p:nvSpPr>
+        <p:spPr>
+          <a:xfrm>
+            <a:off x="9763125" y="3492847"/>
+            <a:ext cx="7900035" cy="392311"/>
+          </a:xfrm>
+          <a:prstGeom prst="rect">
+            <a:avLst/>
+          </a:prstGeom>
+          <a:noFill/>
+          <a:ln/>
+        </p:spPr>
+        <p:txBody>
+          <a:bodyPr wrap="square" lIns="25400" tIns="25400" rIns="25400" bIns="25400" rtlCol="0" anchor="t">
+            <a:normAutofit/>
+          </a:bodyPr>
+          <a:lstStyle/>
+          <a:p>
+            <a:pPr algn="l" indent="0" marL="0">
+              <a:lnSpc>
+                <a:spcPct val="137778"/>
+              </a:lnSpc>
+              <a:buNone/>
+            </a:pPr>
+            <a:r>
+              <a:rPr lang="en-US" sz="1800" spc="216" kern="0" dirty="0">
+                <a:solidFill>
+                  <a:srgbClr val="416180"/>
+                </a:solidFill>
+                <a:latin typeface="Courier New" pitchFamily="34" charset="0"/>
+                <a:ea typeface="Courier New" pitchFamily="34" charset="-122"/>
+                <a:cs typeface="Courier New" pitchFamily="34" charset="-120"/>
+              </a:rPr>
+              <a:t>回收路徑 2</a:t>
+            </a:r>
+            <a:endParaRPr lang="en-US" sz="1800" dirty="0"/>
+          </a:p>
+        </p:txBody>
+      </p:sp>
+      <p:sp>
+        <p:nvSpPr>
+          <p:cNvPr id="11" name="Text 9"/>
+          <p:cNvSpPr/>
+          <p:nvPr/>
+        </p:nvSpPr>
+        <p:spPr>
+          <a:xfrm>
+            <a:off x="9763125" y="4037558"/>
+            <a:ext cx="7900035" cy="549325"/>
+          </a:xfrm>
+          <a:prstGeom prst="rect">
+            <a:avLst/>
+          </a:prstGeom>
+          <a:noFill/>
+          <a:ln/>
+        </p:spPr>
+        <p:txBody>
+          <a:bodyPr wrap="square" lIns="25400" tIns="25400" rIns="25400" bIns="25400" rtlCol="0" anchor="t">
+            <a:normAutofit/>
+          </a:bodyPr>
+          <a:lstStyle/>
+          <a:p>
+            <a:pPr algn="l" indent="0" marL="0">
+              <a:lnSpc>
+                <a:spcPct val="107360"/>
+              </a:lnSpc>
+              <a:buNone/>
+            </a:pPr>
+            <a:r>
+              <a:rPr lang="en-US" sz="3300" b="1" spc="-49" kern="0" dirty="0">
+                <a:solidFill>
+                  <a:srgbClr val="1D1F20"/>
+                </a:solidFill>
+                <a:latin typeface="Arial" pitchFamily="34" charset="0"/>
+                <a:ea typeface="Arial" pitchFamily="34" charset="-122"/>
+                <a:cs typeface="Arial" pitchFamily="34" charset="-120"/>
+              </a:rPr>
+              <a:t>做出輔助教學的工具</a:t>
+            </a:r>
+            <a:endParaRPr lang="en-US" sz="3300" dirty="0"/>
+          </a:p>
+        </p:txBody>
+      </p:sp>
+      <p:sp>
+        <p:nvSpPr>
+          <p:cNvPr id="12" name="Text 10"/>
+          <p:cNvSpPr/>
+          <p:nvPr/>
+        </p:nvSpPr>
+        <p:spPr>
+          <a:xfrm>
+            <a:off x="9763125" y="4739283"/>
+            <a:ext cx="7397306" cy="830461"/>
+          </a:xfrm>
+          <a:prstGeom prst="rect">
+            <a:avLst/>
+          </a:prstGeom>
+          <a:noFill/>
+          <a:ln/>
+        </p:spPr>
+        <p:txBody>
+          <a:bodyPr wrap="square" lIns="25400" tIns="25400" rIns="25400" bIns="25400" rtlCol="0" anchor="t">
+            <a:normAutofit/>
+          </a:bodyPr>
+          <a:lstStyle/>
+          <a:p>
+            <a:pPr algn="l" indent="0" marL="0">
+              <a:lnSpc>
+                <a:spcPct val="134194"/>
+              </a:lnSpc>
+              <a:buNone/>
+            </a:pPr>
+            <a:r>
+              <a:rPr lang="en-US" sz="1950" dirty="0">
+                <a:solidFill>
+                  <a:srgbClr val="5D5D60"/>
+                </a:solidFill>
+                <a:latin typeface="Arial" pitchFamily="34" charset="0"/>
+                <a:ea typeface="Arial" pitchFamily="34" charset="-122"/>
+                <a:cs typeface="Arial" pitchFamily="34" charset="-120"/>
+              </a:rPr>
+              <a:t>個人專題的題材就是高中教材製作與課堂輔助，不是一般的生活小工具。</a:t>
+            </a:r>
+            <a:endParaRPr lang="en-US" sz="1950" dirty="0"/>
+          </a:p>
+        </p:txBody>
+      </p:sp>
+      <p:sp>
+        <p:nvSpPr>
+          <p:cNvPr id="13" name="Text 11"/>
+          <p:cNvSpPr/>
+          <p:nvPr/>
+        </p:nvSpPr>
+        <p:spPr>
+          <a:xfrm>
+            <a:off x="990600" y="6417469"/>
+            <a:ext cx="10642671" cy="1013222"/>
+          </a:xfrm>
+          <a:prstGeom prst="rect">
+            <a:avLst/>
+          </a:prstGeom>
+          <a:noFill/>
+          <a:ln/>
+        </p:spPr>
+        <p:txBody>
+          <a:bodyPr wrap="square" lIns="25400" tIns="25400" rIns="25400" bIns="25400" rtlCol="0" anchor="t">
+            <a:normAutofit/>
+          </a:bodyPr>
+          <a:lstStyle/>
+          <a:p>
+            <a:pPr algn="l" indent="0" marL="0">
+              <a:lnSpc>
+                <a:spcPct val="138378"/>
+              </a:lnSpc>
+              <a:buNone/>
+            </a:pPr>
+            <a:r>
+              <a:rPr lang="en-US" sz="2400" dirty="0">
+                <a:solidFill>
+                  <a:srgbClr val="1D1F20"/>
+                </a:solidFill>
+                <a:latin typeface="Arial" pitchFamily="34" charset="0"/>
+                <a:ea typeface="Arial" pitchFamily="34" charset="-122"/>
+                <a:cs typeface="Arial" pitchFamily="34" charset="-120"/>
+              </a:rPr>
+              <a:t>學生不需要任何帳號：老師做出來的是一個網頁，學生只是打開來使用。這繞開了未成年帳號與家長同意的問題。</a:t>
+            </a:r>
+            <a:endParaRPr lang="en-US" sz="2400" dirty="0"/>
+          </a:p>
+        </p:txBody>
+      </p:sp>
+    </p:spTree>
+  </p:cSld>
+  <p:clrMapOvr>
+    <a:masterClrMapping/>
+  </p:clrMapOvr>
+</p:sld>
+</file>
+
+<file path=ppt/slides/slide24.xml><?xml version="1.0" encoding="utf-8"?>
+<p:sld xmlns:a="http://schemas.openxmlformats.org/drawingml/2006/main" xmlns:r="http://schemas.openxmlformats.org/officeDocument/2006/relationships" xmlns:p="http://schemas.openxmlformats.org/presentationml/2006/main">
+  <p:cSld name="Slide 7">
+    <p:bg>
+      <p:bgPr>
+        <a:solidFill>
+          <a:srgbClr val="F2F2F3"/>
+        </a:solidFill>
+      </p:bgPr>
+    </p:bg>
+    <p:spTree>
+      <p:nvGrpSpPr>
+        <p:cNvPr id="1" name=""/>
+        <p:cNvGrpSpPr/>
+        <p:nvPr/>
+      </p:nvGrpSpPr>
+      <p:grpSpPr>
+        <a:xfrm>
+          <a:off x="0" y="0"/>
+          <a:ext cx="0" cy="0"/>
+          <a:chOff x="0" y="0"/>
+          <a:chExt cx="0" cy="0"/>
+        </a:xfrm>
+      </p:grpSpPr>
+      <p:sp>
+        <p:nvSpPr>
+          <p:cNvPr id="2" name="Text 0"/>
+          <p:cNvSpPr/>
+          <p:nvPr/>
+        </p:nvSpPr>
+        <p:spPr>
+          <a:xfrm>
+            <a:off x="990600" y="914400"/>
+            <a:ext cx="17937480" cy="392311"/>
+          </a:xfrm>
+          <a:prstGeom prst="rect">
+            <a:avLst/>
+          </a:prstGeom>
+          <a:noFill/>
+          <a:ln/>
+        </p:spPr>
+        <p:txBody>
+          <a:bodyPr wrap="square" lIns="25400" tIns="25400" rIns="25400" bIns="25400" rtlCol="0" anchor="t">
+            <a:normAutofit/>
+          </a:bodyPr>
+          <a:lstStyle/>
+          <a:p>
+            <a:pPr algn="l" indent="0" marL="0">
+              <a:lnSpc>
+                <a:spcPct val="137778"/>
+              </a:lnSpc>
+              <a:buNone/>
+            </a:pPr>
+            <a:r>
+              <a:rPr lang="en-US" sz="1800" spc="252" kern="0" dirty="0">
+                <a:solidFill>
+                  <a:srgbClr val="416180"/>
+                </a:solidFill>
+                <a:latin typeface="Courier New" pitchFamily="34" charset="0"/>
+                <a:ea typeface="Courier New" pitchFamily="34" charset="-122"/>
+                <a:cs typeface="Courier New" pitchFamily="34" charset="-120"/>
+              </a:rPr>
+              <a:t>INQUIRY</a:t>
+            </a:r>
+            <a:endParaRPr lang="en-US" sz="1800" dirty="0"/>
+          </a:p>
+        </p:txBody>
+      </p:sp>
+      <p:sp>
+        <p:nvSpPr>
+          <p:cNvPr id="3" name="Text 1"/>
+          <p:cNvSpPr/>
+          <p:nvPr/>
+        </p:nvSpPr>
+        <p:spPr>
+          <a:xfrm>
+            <a:off x="990600" y="1440061"/>
+            <a:ext cx="17937480" cy="776436"/>
+          </a:xfrm>
+          <a:prstGeom prst="rect">
+            <a:avLst/>
+          </a:prstGeom>
+          <a:noFill/>
+          <a:ln/>
+        </p:spPr>
+        <p:txBody>
+          <a:bodyPr wrap="square" lIns="25400" tIns="25400" rIns="25400" bIns="25400" rtlCol="0" anchor="t">
+            <a:normAutofit/>
+          </a:bodyPr>
+          <a:lstStyle/>
+          <a:p>
+            <a:pPr algn="l" indent="0" marL="0">
+              <a:lnSpc>
+                <a:spcPct val="99385"/>
+              </a:lnSpc>
+              <a:buNone/>
+            </a:pPr>
+            <a:r>
+              <a:rPr lang="en-US" sz="5100" b="1" spc="-76" kern="0" dirty="0">
+                <a:solidFill>
+                  <a:srgbClr val="1D1F20"/>
+                </a:solidFill>
+                <a:latin typeface="Arial" pitchFamily="34" charset="0"/>
+                <a:ea typeface="Arial" pitchFamily="34" charset="-122"/>
+                <a:cs typeface="Arial" pitchFamily="34" charset="-120"/>
+              </a:rPr>
+              <a:t>六步流程就是探究歷程</a:t>
+            </a:r>
+            <a:endParaRPr lang="en-US" sz="5100" dirty="0"/>
+          </a:p>
+        </p:txBody>
+      </p:sp>
+      <p:sp>
+        <p:nvSpPr>
+          <p:cNvPr id="4" name="Shape 2"/>
+          <p:cNvSpPr/>
+          <p:nvPr/>
+        </p:nvSpPr>
+        <p:spPr>
+          <a:xfrm>
+            <a:off x="990600" y="3289846"/>
+            <a:ext cx="3587353" cy="9525"/>
+          </a:xfrm>
+          <a:prstGeom prst="rect">
+            <a:avLst/>
+          </a:prstGeom>
+          <a:solidFill>
+            <a:srgbClr val="1F1F1F">
+              <a:alpha val="16000"/>
+            </a:srgbClr>
+          </a:solidFill>
+          <a:ln/>
+        </p:spPr>
+      </p:sp>
+      <p:sp>
+        <p:nvSpPr>
+          <p:cNvPr id="5" name="Text 3"/>
+          <p:cNvSpPr/>
+          <p:nvPr/>
+        </p:nvSpPr>
+        <p:spPr>
+          <a:xfrm>
+            <a:off x="990600" y="2787997"/>
+            <a:ext cx="3466374" cy="387548"/>
+          </a:xfrm>
+          <a:prstGeom prst="rect">
+            <a:avLst/>
+          </a:prstGeom>
+          <a:noFill/>
+          <a:ln/>
+        </p:spPr>
+        <p:txBody>
+          <a:bodyPr wrap="square" lIns="25400" tIns="25400" rIns="25400" bIns="25400" rtlCol="0" anchor="ctr">
+            <a:normAutofit/>
+          </a:bodyPr>
+          <a:lstStyle/>
+          <a:p>
+            <a:pPr algn="l" indent="0" marL="0">
+              <a:lnSpc>
+                <a:spcPct val="137778"/>
+              </a:lnSpc>
+              <a:buNone/>
+            </a:pPr>
+            <a:r>
+              <a:rPr lang="en-US" sz="1800" spc="180" kern="0" dirty="0">
+                <a:solidFill>
+                  <a:srgbClr val="7A7A7D"/>
+                </a:solidFill>
+                <a:latin typeface="Courier New" pitchFamily="34" charset="0"/>
+                <a:ea typeface="Courier New" pitchFamily="34" charset="-122"/>
+                <a:cs typeface="Courier New" pitchFamily="34" charset="-120"/>
+              </a:rPr>
+              <a:t>今天的六步</a:t>
+            </a:r>
+            <a:endParaRPr lang="en-US" sz="1800" dirty="0"/>
+          </a:p>
+        </p:txBody>
+      </p:sp>
+      <p:sp>
+        <p:nvSpPr>
+          <p:cNvPr id="6" name="Shape 4"/>
+          <p:cNvSpPr/>
+          <p:nvPr/>
+        </p:nvSpPr>
+        <p:spPr>
+          <a:xfrm>
+            <a:off x="4577953" y="3289846"/>
+            <a:ext cx="12719447" cy="9525"/>
+          </a:xfrm>
+          <a:prstGeom prst="rect">
+            <a:avLst/>
+          </a:prstGeom>
+          <a:solidFill>
+            <a:srgbClr val="1F1F1F">
+              <a:alpha val="16000"/>
+            </a:srgbClr>
+          </a:solidFill>
+          <a:ln/>
+        </p:spPr>
+      </p:sp>
+      <p:sp>
+        <p:nvSpPr>
+          <p:cNvPr id="7" name="Text 5"/>
+          <p:cNvSpPr/>
+          <p:nvPr/>
+        </p:nvSpPr>
+        <p:spPr>
+          <a:xfrm>
+            <a:off x="4577953" y="2787997"/>
+            <a:ext cx="13101030" cy="387548"/>
+          </a:xfrm>
+          <a:prstGeom prst="rect">
+            <a:avLst/>
+          </a:prstGeom>
+          <a:noFill/>
+          <a:ln/>
+        </p:spPr>
+        <p:txBody>
+          <a:bodyPr wrap="square" lIns="25400" tIns="25400" rIns="25400" bIns="25400" rtlCol="0" anchor="ctr">
+            <a:normAutofit/>
+          </a:bodyPr>
+          <a:lstStyle/>
+          <a:p>
+            <a:pPr algn="l" indent="0" marL="0">
+              <a:lnSpc>
+                <a:spcPct val="137778"/>
+              </a:lnSpc>
+              <a:buNone/>
+            </a:pPr>
+            <a:r>
+              <a:rPr lang="en-US" sz="1800" spc="180" kern="0" dirty="0">
+                <a:solidFill>
+                  <a:srgbClr val="7A7A7D"/>
+                </a:solidFill>
+                <a:latin typeface="Courier New" pitchFamily="34" charset="0"/>
+                <a:ea typeface="Courier New" pitchFamily="34" charset="-122"/>
+                <a:cs typeface="Courier New" pitchFamily="34" charset="-120"/>
+              </a:rPr>
+              <a:t>學生的探究歷程</a:t>
+            </a:r>
+            <a:endParaRPr lang="en-US" sz="1800" dirty="0"/>
+          </a:p>
+        </p:txBody>
+      </p:sp>
+      <p:sp>
+        <p:nvSpPr>
+          <p:cNvPr id="8" name="Shape 6"/>
+          <p:cNvSpPr/>
+          <p:nvPr/>
+        </p:nvSpPr>
+        <p:spPr>
+          <a:xfrm>
+            <a:off x="990600" y="4190851"/>
+            <a:ext cx="3587353" cy="9525"/>
+          </a:xfrm>
+          <a:prstGeom prst="rect">
+            <a:avLst/>
+          </a:prstGeom>
+          <a:solidFill>
+            <a:srgbClr val="D6EBFF"/>
+          </a:solidFill>
+          <a:ln/>
+        </p:spPr>
+      </p:sp>
+      <p:sp>
+        <p:nvSpPr>
+          <p:cNvPr id="9" name="Text 7"/>
+          <p:cNvSpPr/>
+          <p:nvPr/>
+        </p:nvSpPr>
+        <p:spPr>
+          <a:xfrm>
+            <a:off x="990600" y="3508921"/>
+            <a:ext cx="3466374" cy="510480"/>
+          </a:xfrm>
+          <a:prstGeom prst="rect">
+            <a:avLst/>
+          </a:prstGeom>
+          <a:noFill/>
+          <a:ln/>
+        </p:spPr>
+        <p:txBody>
+          <a:bodyPr wrap="square" lIns="25400" tIns="25400" rIns="25400" bIns="25400" rtlCol="0" anchor="ctr">
+            <a:normAutofit/>
+          </a:bodyPr>
+          <a:lstStyle/>
+          <a:p>
+            <a:pPr algn="l" indent="0" marL="0">
+              <a:lnSpc>
+                <a:spcPct val="134054"/>
+              </a:lnSpc>
+              <a:buNone/>
+            </a:pPr>
+            <a:r>
+              <a:rPr lang="en-US" sz="2400" dirty="0">
+                <a:solidFill>
+                  <a:srgbClr val="1D1F20"/>
+                </a:solidFill>
+                <a:latin typeface="Arial" pitchFamily="34" charset="0"/>
+                <a:ea typeface="Arial" pitchFamily="34" charset="-122"/>
+                <a:cs typeface="Arial" pitchFamily="34" charset="-120"/>
+              </a:rPr>
+              <a:t>提出問題</a:t>
+            </a:r>
+            <a:endParaRPr lang="en-US" sz="2400" dirty="0"/>
+          </a:p>
+        </p:txBody>
+      </p:sp>
+      <p:sp>
+        <p:nvSpPr>
+          <p:cNvPr id="10" name="Shape 8"/>
+          <p:cNvSpPr/>
+          <p:nvPr/>
+        </p:nvSpPr>
+        <p:spPr>
+          <a:xfrm>
+            <a:off x="4577953" y="4190851"/>
+            <a:ext cx="12719447" cy="9525"/>
+          </a:xfrm>
+          <a:prstGeom prst="rect">
+            <a:avLst/>
+          </a:prstGeom>
+          <a:solidFill>
+            <a:srgbClr val="D6EBFF"/>
+          </a:solidFill>
+          <a:ln/>
+        </p:spPr>
+      </p:sp>
+      <p:sp>
+        <p:nvSpPr>
+          <p:cNvPr id="11" name="Text 9"/>
+          <p:cNvSpPr/>
+          <p:nvPr/>
+        </p:nvSpPr>
+        <p:spPr>
+          <a:xfrm>
+            <a:off x="4577953" y="3508921"/>
+            <a:ext cx="13101030" cy="510480"/>
+          </a:xfrm>
+          <a:prstGeom prst="rect">
+            <a:avLst/>
+          </a:prstGeom>
+          <a:noFill/>
+          <a:ln/>
+        </p:spPr>
+        <p:txBody>
+          <a:bodyPr wrap="square" lIns="25400" tIns="25400" rIns="25400" bIns="25400" rtlCol="0" anchor="ctr">
+            <a:normAutofit/>
+          </a:bodyPr>
+          <a:lstStyle/>
+          <a:p>
+            <a:pPr algn="l" indent="0" marL="0">
+              <a:lnSpc>
+                <a:spcPct val="134054"/>
+              </a:lnSpc>
+              <a:buNone/>
+            </a:pPr>
+            <a:r>
+              <a:rPr lang="en-US" sz="2400" dirty="0">
+                <a:solidFill>
+                  <a:srgbClr val="1D1F20"/>
+                </a:solidFill>
+                <a:latin typeface="Arial" pitchFamily="34" charset="0"/>
+                <a:ea typeface="Arial" pitchFamily="34" charset="-122"/>
+                <a:cs typeface="Arial" pitchFamily="34" charset="-120"/>
+              </a:rPr>
+              <a:t>觀察現象，提出可探究的問題</a:t>
+            </a:r>
+            <a:endParaRPr lang="en-US" sz="2400" dirty="0"/>
+          </a:p>
+        </p:txBody>
+      </p:sp>
+      <p:sp>
+        <p:nvSpPr>
+          <p:cNvPr id="12" name="Shape 10"/>
+          <p:cNvSpPr/>
+          <p:nvPr/>
+        </p:nvSpPr>
+        <p:spPr>
+          <a:xfrm>
+            <a:off x="990600" y="5091857"/>
+            <a:ext cx="3587353" cy="9525"/>
+          </a:xfrm>
+          <a:prstGeom prst="rect">
+            <a:avLst/>
+          </a:prstGeom>
+          <a:solidFill>
+            <a:srgbClr val="D6EBFF"/>
+          </a:solidFill>
+          <a:ln/>
+        </p:spPr>
+      </p:sp>
+      <p:sp>
+        <p:nvSpPr>
+          <p:cNvPr id="13" name="Text 11"/>
+          <p:cNvSpPr/>
+          <p:nvPr/>
+        </p:nvSpPr>
+        <p:spPr>
+          <a:xfrm>
+            <a:off x="990600" y="4409926"/>
+            <a:ext cx="3466374" cy="510480"/>
+          </a:xfrm>
+          <a:prstGeom prst="rect">
+            <a:avLst/>
+          </a:prstGeom>
+          <a:noFill/>
+          <a:ln/>
+        </p:spPr>
+        <p:txBody>
+          <a:bodyPr wrap="square" lIns="25400" tIns="25400" rIns="25400" bIns="25400" rtlCol="0" anchor="ctr">
+            <a:normAutofit/>
+          </a:bodyPr>
+          <a:lstStyle/>
+          <a:p>
+            <a:pPr algn="l" indent="0" marL="0">
+              <a:lnSpc>
+                <a:spcPct val="134054"/>
+              </a:lnSpc>
+              <a:buNone/>
+            </a:pPr>
+            <a:r>
+              <a:rPr lang="en-US" sz="2400" dirty="0">
+                <a:solidFill>
+                  <a:srgbClr val="1D1F20"/>
+                </a:solidFill>
+                <a:latin typeface="Arial" pitchFamily="34" charset="0"/>
+                <a:ea typeface="Arial" pitchFamily="34" charset="-122"/>
+                <a:cs typeface="Arial" pitchFamily="34" charset="-120"/>
+              </a:rPr>
+              <a:t>定義目標與驗收條件</a:t>
+            </a:r>
+            <a:endParaRPr lang="en-US" sz="2400" dirty="0"/>
+          </a:p>
+        </p:txBody>
+      </p:sp>
+      <p:sp>
+        <p:nvSpPr>
+          <p:cNvPr id="14" name="Shape 12"/>
+          <p:cNvSpPr/>
+          <p:nvPr/>
+        </p:nvSpPr>
+        <p:spPr>
+          <a:xfrm>
+            <a:off x="4577953" y="5091857"/>
+            <a:ext cx="12719447" cy="9525"/>
+          </a:xfrm>
+          <a:prstGeom prst="rect">
+            <a:avLst/>
+          </a:prstGeom>
+          <a:solidFill>
+            <a:srgbClr val="D6EBFF"/>
+          </a:solidFill>
+          <a:ln/>
+        </p:spPr>
+      </p:sp>
+      <p:sp>
+        <p:nvSpPr>
+          <p:cNvPr id="15" name="Text 13"/>
+          <p:cNvSpPr/>
+          <p:nvPr/>
+        </p:nvSpPr>
+        <p:spPr>
+          <a:xfrm>
+            <a:off x="4577953" y="4409926"/>
+            <a:ext cx="13101030" cy="510480"/>
+          </a:xfrm>
+          <a:prstGeom prst="rect">
+            <a:avLst/>
+          </a:prstGeom>
+          <a:noFill/>
+          <a:ln/>
+        </p:spPr>
+        <p:txBody>
+          <a:bodyPr wrap="square" lIns="25400" tIns="25400" rIns="25400" bIns="25400" rtlCol="0" anchor="ctr">
+            <a:normAutofit/>
+          </a:bodyPr>
+          <a:lstStyle/>
+          <a:p>
+            <a:pPr algn="l" indent="0" marL="0">
+              <a:lnSpc>
+                <a:spcPct val="134054"/>
+              </a:lnSpc>
+              <a:buNone/>
+            </a:pPr>
+            <a:r>
+              <a:rPr lang="en-US" sz="2400" dirty="0">
+                <a:solidFill>
+                  <a:srgbClr val="1D1F20"/>
+                </a:solidFill>
+                <a:latin typeface="Arial" pitchFamily="34" charset="0"/>
+                <a:ea typeface="Arial" pitchFamily="34" charset="-122"/>
+                <a:cs typeface="Arial" pitchFamily="34" charset="-120"/>
+              </a:rPr>
+              <a:t>把問題縮成可檢驗的預測</a:t>
+            </a:r>
+            <a:endParaRPr lang="en-US" sz="2400" dirty="0"/>
+          </a:p>
+        </p:txBody>
+      </p:sp>
+      <p:sp>
+        <p:nvSpPr>
+          <p:cNvPr id="16" name="Shape 14"/>
+          <p:cNvSpPr/>
+          <p:nvPr/>
+        </p:nvSpPr>
+        <p:spPr>
+          <a:xfrm>
+            <a:off x="990600" y="5992862"/>
+            <a:ext cx="3587353" cy="9525"/>
+          </a:xfrm>
+          <a:prstGeom prst="rect">
+            <a:avLst/>
+          </a:prstGeom>
+          <a:solidFill>
+            <a:srgbClr val="D6EBFF"/>
+          </a:solidFill>
+          <a:ln/>
+        </p:spPr>
+      </p:sp>
+      <p:sp>
+        <p:nvSpPr>
+          <p:cNvPr id="17" name="Text 15"/>
+          <p:cNvSpPr/>
+          <p:nvPr/>
+        </p:nvSpPr>
+        <p:spPr>
+          <a:xfrm>
+            <a:off x="990600" y="5310932"/>
+            <a:ext cx="3466374" cy="510480"/>
+          </a:xfrm>
+          <a:prstGeom prst="rect">
+            <a:avLst/>
+          </a:prstGeom>
+          <a:noFill/>
+          <a:ln/>
+        </p:spPr>
+        <p:txBody>
+          <a:bodyPr wrap="square" lIns="25400" tIns="25400" rIns="25400" bIns="25400" rtlCol="0" anchor="ctr">
+            <a:normAutofit/>
+          </a:bodyPr>
+          <a:lstStyle/>
+          <a:p>
+            <a:pPr algn="l" indent="0" marL="0">
+              <a:lnSpc>
+                <a:spcPct val="134054"/>
+              </a:lnSpc>
+              <a:buNone/>
+            </a:pPr>
+            <a:r>
+              <a:rPr lang="en-US" sz="2400" dirty="0">
+                <a:solidFill>
+                  <a:srgbClr val="1D1F20"/>
+                </a:solidFill>
+                <a:latin typeface="Arial" pitchFamily="34" charset="0"/>
+                <a:ea typeface="Arial" pitchFamily="34" charset="-122"/>
+                <a:cs typeface="Arial" pitchFamily="34" charset="-120"/>
+              </a:rPr>
+              <a:t>拆解計畫</a:t>
+            </a:r>
+            <a:endParaRPr lang="en-US" sz="2400" dirty="0"/>
+          </a:p>
+        </p:txBody>
+      </p:sp>
+      <p:sp>
+        <p:nvSpPr>
+          <p:cNvPr id="18" name="Shape 16"/>
+          <p:cNvSpPr/>
+          <p:nvPr/>
+        </p:nvSpPr>
+        <p:spPr>
+          <a:xfrm>
+            <a:off x="4577953" y="5992862"/>
+            <a:ext cx="12719447" cy="9525"/>
+          </a:xfrm>
+          <a:prstGeom prst="rect">
+            <a:avLst/>
+          </a:prstGeom>
+          <a:solidFill>
+            <a:srgbClr val="D6EBFF"/>
+          </a:solidFill>
+          <a:ln/>
+        </p:spPr>
+      </p:sp>
+      <p:sp>
+        <p:nvSpPr>
+          <p:cNvPr id="19" name="Text 17"/>
+          <p:cNvSpPr/>
+          <p:nvPr/>
+        </p:nvSpPr>
+        <p:spPr>
+          <a:xfrm>
+            <a:off x="4577953" y="5310932"/>
+            <a:ext cx="13101030" cy="510480"/>
+          </a:xfrm>
+          <a:prstGeom prst="rect">
+            <a:avLst/>
+          </a:prstGeom>
+          <a:noFill/>
+          <a:ln/>
+        </p:spPr>
+        <p:txBody>
+          <a:bodyPr wrap="square" lIns="25400" tIns="25400" rIns="25400" bIns="25400" rtlCol="0" anchor="ctr">
+            <a:normAutofit/>
+          </a:bodyPr>
+          <a:lstStyle/>
+          <a:p>
+            <a:pPr algn="l" indent="0" marL="0">
+              <a:lnSpc>
+                <a:spcPct val="134054"/>
+              </a:lnSpc>
+              <a:buNone/>
+            </a:pPr>
+            <a:r>
+              <a:rPr lang="en-US" sz="2400" dirty="0">
+                <a:solidFill>
+                  <a:srgbClr val="1D1F20"/>
+                </a:solidFill>
+                <a:latin typeface="Arial" pitchFamily="34" charset="0"/>
+                <a:ea typeface="Arial" pitchFamily="34" charset="-122"/>
+                <a:cs typeface="Arial" pitchFamily="34" charset="-120"/>
+              </a:rPr>
+              <a:t>設計步驟與方法</a:t>
+            </a:r>
+            <a:endParaRPr lang="en-US" sz="2400" dirty="0"/>
+          </a:p>
+        </p:txBody>
+      </p:sp>
+      <p:sp>
+        <p:nvSpPr>
+          <p:cNvPr id="20" name="Shape 18"/>
+          <p:cNvSpPr/>
+          <p:nvPr/>
+        </p:nvSpPr>
+        <p:spPr>
+          <a:xfrm>
+            <a:off x="990600" y="6893868"/>
+            <a:ext cx="3587353" cy="9525"/>
+          </a:xfrm>
+          <a:prstGeom prst="rect">
+            <a:avLst/>
+          </a:prstGeom>
+          <a:solidFill>
+            <a:srgbClr val="D6EBFF"/>
+          </a:solidFill>
+          <a:ln/>
+        </p:spPr>
+      </p:sp>
+      <p:sp>
+        <p:nvSpPr>
+          <p:cNvPr id="21" name="Text 19"/>
+          <p:cNvSpPr/>
+          <p:nvPr/>
+        </p:nvSpPr>
+        <p:spPr>
+          <a:xfrm>
+            <a:off x="990600" y="6211937"/>
+            <a:ext cx="3466374" cy="510480"/>
+          </a:xfrm>
+          <a:prstGeom prst="rect">
+            <a:avLst/>
+          </a:prstGeom>
+          <a:noFill/>
+          <a:ln/>
+        </p:spPr>
+        <p:txBody>
+          <a:bodyPr wrap="square" lIns="25400" tIns="25400" rIns="25400" bIns="25400" rtlCol="0" anchor="ctr">
+            <a:normAutofit/>
+          </a:bodyPr>
+          <a:lstStyle/>
+          <a:p>
+            <a:pPr algn="l" indent="0" marL="0">
+              <a:lnSpc>
+                <a:spcPct val="134054"/>
+              </a:lnSpc>
+              <a:buNone/>
+            </a:pPr>
+            <a:r>
+              <a:rPr lang="en-US" sz="2400" dirty="0">
+                <a:solidFill>
+                  <a:srgbClr val="1D1F20"/>
+                </a:solidFill>
+                <a:latin typeface="Arial" pitchFamily="34" charset="0"/>
+                <a:ea typeface="Arial" pitchFamily="34" charset="-122"/>
+                <a:cs typeface="Arial" pitchFamily="34" charset="-120"/>
+              </a:rPr>
+              <a:t>分段實作</a:t>
+            </a:r>
+            <a:endParaRPr lang="en-US" sz="2400" dirty="0"/>
+          </a:p>
+        </p:txBody>
+      </p:sp>
+      <p:sp>
+        <p:nvSpPr>
+          <p:cNvPr id="22" name="Shape 20"/>
+          <p:cNvSpPr/>
+          <p:nvPr/>
+        </p:nvSpPr>
+        <p:spPr>
+          <a:xfrm>
+            <a:off x="4577953" y="6893868"/>
+            <a:ext cx="12719447" cy="9525"/>
+          </a:xfrm>
+          <a:prstGeom prst="rect">
+            <a:avLst/>
+          </a:prstGeom>
+          <a:solidFill>
+            <a:srgbClr val="D6EBFF"/>
+          </a:solidFill>
+          <a:ln/>
+        </p:spPr>
+      </p:sp>
+      <p:sp>
+        <p:nvSpPr>
+          <p:cNvPr id="23" name="Text 21"/>
+          <p:cNvSpPr/>
+          <p:nvPr/>
+        </p:nvSpPr>
+        <p:spPr>
+          <a:xfrm>
+            <a:off x="4577953" y="6211937"/>
+            <a:ext cx="13101030" cy="510480"/>
+          </a:xfrm>
+          <a:prstGeom prst="rect">
+            <a:avLst/>
+          </a:prstGeom>
+          <a:noFill/>
+          <a:ln/>
+        </p:spPr>
+        <p:txBody>
+          <a:bodyPr wrap="square" lIns="25400" tIns="25400" rIns="25400" bIns="25400" rtlCol="0" anchor="ctr">
+            <a:normAutofit/>
+          </a:bodyPr>
+          <a:lstStyle/>
+          <a:p>
+            <a:pPr algn="l" indent="0" marL="0">
+              <a:lnSpc>
+                <a:spcPct val="134054"/>
+              </a:lnSpc>
+              <a:buNone/>
+            </a:pPr>
+            <a:r>
+              <a:rPr lang="en-US" sz="2400" dirty="0">
+                <a:solidFill>
+                  <a:srgbClr val="1D1F20"/>
+                </a:solidFill>
+                <a:latin typeface="Arial" pitchFamily="34" charset="0"/>
+                <a:ea typeface="Arial" pitchFamily="34" charset="-122"/>
+                <a:cs typeface="Arial" pitchFamily="34" charset="-120"/>
+              </a:rPr>
+              <a:t>蒐集資料</a:t>
+            </a:r>
+            <a:endParaRPr lang="en-US" sz="2400" dirty="0"/>
+          </a:p>
+        </p:txBody>
+      </p:sp>
+      <p:sp>
+        <p:nvSpPr>
+          <p:cNvPr id="24" name="Shape 22"/>
+          <p:cNvSpPr/>
+          <p:nvPr/>
+        </p:nvSpPr>
+        <p:spPr>
+          <a:xfrm>
+            <a:off x="990600" y="7794873"/>
+            <a:ext cx="3587353" cy="9525"/>
+          </a:xfrm>
+          <a:prstGeom prst="rect">
+            <a:avLst/>
+          </a:prstGeom>
+          <a:solidFill>
+            <a:srgbClr val="D6EBFF"/>
+          </a:solidFill>
+          <a:ln/>
+        </p:spPr>
+      </p:sp>
+      <p:sp>
+        <p:nvSpPr>
+          <p:cNvPr id="25" name="Text 23"/>
+          <p:cNvSpPr/>
+          <p:nvPr/>
+        </p:nvSpPr>
+        <p:spPr>
+          <a:xfrm>
+            <a:off x="990600" y="7112943"/>
+            <a:ext cx="3466374" cy="510480"/>
+          </a:xfrm>
+          <a:prstGeom prst="rect">
+            <a:avLst/>
+          </a:prstGeom>
+          <a:noFill/>
+          <a:ln/>
+        </p:spPr>
+        <p:txBody>
+          <a:bodyPr wrap="square" lIns="25400" tIns="25400" rIns="25400" bIns="25400" rtlCol="0" anchor="ctr">
+            <a:normAutofit/>
+          </a:bodyPr>
+          <a:lstStyle/>
+          <a:p>
+            <a:pPr algn="l" indent="0" marL="0">
+              <a:lnSpc>
+                <a:spcPct val="134054"/>
+              </a:lnSpc>
+              <a:buNone/>
+            </a:pPr>
+            <a:r>
+              <a:rPr lang="en-US" sz="2400" dirty="0">
+                <a:solidFill>
+                  <a:srgbClr val="1D1F20"/>
+                </a:solidFill>
+                <a:latin typeface="Arial" pitchFamily="34" charset="0"/>
+                <a:ea typeface="Arial" pitchFamily="34" charset="-122"/>
+                <a:cs typeface="Arial" pitchFamily="34" charset="-120"/>
+              </a:rPr>
+              <a:t>驗證</a:t>
+            </a:r>
+            <a:endParaRPr lang="en-US" sz="2400" dirty="0"/>
+          </a:p>
+        </p:txBody>
+      </p:sp>
+      <p:sp>
+        <p:nvSpPr>
+          <p:cNvPr id="26" name="Shape 24"/>
+          <p:cNvSpPr/>
+          <p:nvPr/>
+        </p:nvSpPr>
+        <p:spPr>
+          <a:xfrm>
+            <a:off x="4577953" y="7794873"/>
+            <a:ext cx="12719447" cy="9525"/>
+          </a:xfrm>
+          <a:prstGeom prst="rect">
+            <a:avLst/>
+          </a:prstGeom>
+          <a:solidFill>
+            <a:srgbClr val="D6EBFF"/>
+          </a:solidFill>
+          <a:ln/>
+        </p:spPr>
+      </p:sp>
+      <p:sp>
+        <p:nvSpPr>
+          <p:cNvPr id="27" name="Text 25"/>
+          <p:cNvSpPr/>
+          <p:nvPr/>
+        </p:nvSpPr>
+        <p:spPr>
+          <a:xfrm>
+            <a:off x="4577953" y="7112943"/>
+            <a:ext cx="13101030" cy="510480"/>
+          </a:xfrm>
+          <a:prstGeom prst="rect">
+            <a:avLst/>
+          </a:prstGeom>
+          <a:noFill/>
+          <a:ln/>
+        </p:spPr>
+        <p:txBody>
+          <a:bodyPr wrap="square" lIns="25400" tIns="25400" rIns="25400" bIns="25400" rtlCol="0" anchor="ctr">
+            <a:normAutofit/>
+          </a:bodyPr>
+          <a:lstStyle/>
+          <a:p>
+            <a:pPr algn="l" indent="0" marL="0">
+              <a:lnSpc>
+                <a:spcPct val="134054"/>
+              </a:lnSpc>
+              <a:buNone/>
+            </a:pPr>
+            <a:r>
+              <a:rPr lang="en-US" sz="2400" dirty="0">
+                <a:solidFill>
+                  <a:srgbClr val="1D1F20"/>
+                </a:solidFill>
+                <a:latin typeface="Arial" pitchFamily="34" charset="0"/>
+                <a:ea typeface="Arial" pitchFamily="34" charset="-122"/>
+                <a:cs typeface="Arial" pitchFamily="34" charset="-120"/>
+              </a:rPr>
+              <a:t>對照證據，判斷成立與否</a:t>
+            </a:r>
+            <a:endParaRPr lang="en-US" sz="2400" dirty="0"/>
+          </a:p>
+        </p:txBody>
+      </p:sp>
+      <p:sp>
+        <p:nvSpPr>
+          <p:cNvPr id="28" name="Text 26"/>
+          <p:cNvSpPr/>
+          <p:nvPr/>
+        </p:nvSpPr>
+        <p:spPr>
+          <a:xfrm>
+            <a:off x="990600" y="8013948"/>
+            <a:ext cx="3466374" cy="515243"/>
+          </a:xfrm>
+          <a:prstGeom prst="rect">
+            <a:avLst/>
+          </a:prstGeom>
+          <a:noFill/>
+          <a:ln/>
+        </p:spPr>
+        <p:txBody>
+          <a:bodyPr wrap="square" lIns="25400" tIns="25400" rIns="25400" bIns="25400" rtlCol="0" anchor="ctr">
+            <a:normAutofit/>
+          </a:bodyPr>
+          <a:lstStyle/>
+          <a:p>
+            <a:pPr algn="l" indent="0" marL="0">
+              <a:lnSpc>
+                <a:spcPct val="134054"/>
+              </a:lnSpc>
+              <a:buNone/>
+            </a:pPr>
+            <a:r>
+              <a:rPr lang="en-US" sz="2400" dirty="0">
+                <a:solidFill>
+                  <a:srgbClr val="1D1F20"/>
+                </a:solidFill>
+                <a:latin typeface="Arial" pitchFamily="34" charset="0"/>
+                <a:ea typeface="Arial" pitchFamily="34" charset="-122"/>
+                <a:cs typeface="Arial" pitchFamily="34" charset="-120"/>
+              </a:rPr>
+              <a:t>決定下一步</a:t>
+            </a:r>
+            <a:endParaRPr lang="en-US" sz="2400" dirty="0"/>
+          </a:p>
+        </p:txBody>
+      </p:sp>
+      <p:sp>
+        <p:nvSpPr>
+          <p:cNvPr id="29" name="Text 27"/>
+          <p:cNvSpPr/>
+          <p:nvPr/>
+        </p:nvSpPr>
+        <p:spPr>
+          <a:xfrm>
+            <a:off x="4577953" y="8013948"/>
+            <a:ext cx="13101030" cy="515243"/>
+          </a:xfrm>
+          <a:prstGeom prst="rect">
+            <a:avLst/>
+          </a:prstGeom>
+          <a:noFill/>
+          <a:ln/>
+        </p:spPr>
+        <p:txBody>
+          <a:bodyPr wrap="square" lIns="25400" tIns="25400" rIns="25400" bIns="25400" rtlCol="0" anchor="ctr">
+            <a:normAutofit/>
+          </a:bodyPr>
+          <a:lstStyle/>
+          <a:p>
+            <a:pPr algn="l" indent="0" marL="0">
+              <a:lnSpc>
+                <a:spcPct val="134054"/>
+              </a:lnSpc>
+              <a:buNone/>
+            </a:pPr>
+            <a:r>
+              <a:rPr lang="en-US" sz="2400" dirty="0">
+                <a:solidFill>
+                  <a:srgbClr val="1D1F20"/>
+                </a:solidFill>
+                <a:latin typeface="Arial" pitchFamily="34" charset="0"/>
+                <a:ea typeface="Arial" pitchFamily="34" charset="-122"/>
+                <a:cs typeface="Arial" pitchFamily="34" charset="-120"/>
+              </a:rPr>
+              <a:t>推論、表達，並規劃下一輪</a:t>
+            </a:r>
+            <a:endParaRPr lang="en-US" sz="2400" dirty="0"/>
           </a:p>
         </p:txBody>
       </p:sp>

--- a/instructor/LLM2Life_slide_deck.pptx
+++ b/instructor/LLM2Life_slide_deck.pptx
@@ -16946,7 +16946,7 @@
                 <a:ea typeface="Arial" pitchFamily="34" charset="-122"/>
                 <a:cs typeface="Arial" pitchFamily="34" charset="-120"/>
               </a:rPr>
-              <a:t>題目開放。從生活或工作的真實問題縮小到可驗證的最小版本。</a:t>
+              <a:t>題目開放。從教學現場的真實問題縮小到可驗證的最小版本。</a:t>
             </a:r>
             <a:endParaRPr lang="en-US" sz="2400" dirty="0"/>
           </a:p>

--- a/instructor/LLM2Life_slide_deck.pptx
+++ b/instructor/LLM2Life_slide_deck.pptx
@@ -8153,7 +8153,7 @@
                 <a:ea typeface="Arial" pitchFamily="34" charset="-122"/>
                 <a:cs typeface="Arial" pitchFamily="34" charset="-120"/>
               </a:rPr>
-              <a:t>Marp 投影片，76 頁（免費版 77 頁）</a:t>
+              <a:t>Marp 投影片，77 頁（免費版 78 頁）</a:t>
             </a:r>
             <a:endParaRPr lang="en-US" sz="2100" dirty="0"/>
           </a:p>
@@ -8665,7 +8665,7 @@
                 <a:ea typeface="Arial" pitchFamily="34" charset="-122"/>
                 <a:cs typeface="Arial" pitchFamily="34" charset="-120"/>
               </a:rPr>
-              <a:t>付費版</a:t>
+              <a:t>付費＋共用</a:t>
             </a:r>
             <a:endParaRPr lang="en-US" sz="2100" dirty="0"/>
           </a:p>
@@ -8729,7 +8729,7 @@
                 <a:ea typeface="Arial" pitchFamily="34" charset="-122"/>
                 <a:cs typeface="Arial" pitchFamily="34" charset="-120"/>
               </a:rPr>
-              <a:t>流程表、洞見講稿、課前通知信、疑難排解、參考解</a:t>
+              <a:t>流程表、講稿、課前通知信、疑難排解；部分共用</a:t>
             </a:r>
             <a:endParaRPr lang="en-US" sz="2100" dirty="0"/>
           </a:p>
@@ -9054,6 +9054,198 @@
                 <a:cs typeface="Arial" pitchFamily="34" charset="-120"/>
               </a:rPr>
               <a:t>課堂主線。slides/workbook/site/instructor 自成一套</a:t>
+            </a:r>
+            <a:endParaRPr lang="en-US" sz="2100" dirty="0"/>
+          </a:p>
+        </p:txBody>
+      </p:sp>
+      <p:sp>
+        <p:nvSpPr>
+          <p:cNvPr id="43" name="Shape 32"/>
+          <p:cNvSpPr/>
+          <p:nvPr/>
+        </p:nvSpPr>
+        <p:spPr>
+          <a:xfrm>
+            <a:off x="990600" y="8032849"/>
+            <a:ext cx="3913584" cy="9525"/>
+          </a:xfrm>
+          <a:prstGeom prst="rect">
+            <a:avLst/>
+          </a:prstGeom>
+          <a:solidFill>
+            <a:srgbClr val="D6EBFF"/>
+          </a:solidFill>
+          <a:ln/>
+        </p:spPr>
+      </p:sp>
+      <p:sp>
+        <p:nvSpPr>
+          <p:cNvPr id="44" name="Shape 34"/>
+          <p:cNvSpPr/>
+          <p:nvPr/>
+        </p:nvSpPr>
+        <p:spPr>
+          <a:xfrm>
+            <a:off x="4904184" y="8032849"/>
+            <a:ext cx="1956792" cy="9525"/>
+          </a:xfrm>
+          <a:prstGeom prst="rect">
+            <a:avLst/>
+          </a:prstGeom>
+          <a:solidFill>
+            <a:srgbClr val="D6EBFF"/>
+          </a:solidFill>
+          <a:ln/>
+        </p:spPr>
+      </p:sp>
+      <p:sp>
+        <p:nvSpPr>
+          <p:cNvPr id="45" name="Shape 36"/>
+          <p:cNvSpPr/>
+          <p:nvPr/>
+        </p:nvSpPr>
+        <p:spPr>
+          <a:xfrm>
+            <a:off x="6860977" y="8032849"/>
+            <a:ext cx="10436423" cy="9525"/>
+          </a:xfrm>
+          <a:prstGeom prst="rect">
+            <a:avLst/>
+          </a:prstGeom>
+          <a:solidFill>
+            <a:srgbClr val="D6EBFF"/>
+          </a:solidFill>
+          <a:ln/>
+        </p:spPr>
+      </p:sp>
+      <p:sp>
+        <p:nvSpPr>
+          <p:cNvPr id="46" name="Text 38"/>
+          <p:cNvSpPr/>
+          <p:nvPr/>
+        </p:nvSpPr>
+        <p:spPr>
+          <a:xfrm>
+            <a:off x="990600" y="8232874"/>
+            <a:ext cx="3802392" cy="456158"/>
+          </a:xfrm>
+          <a:prstGeom prst="rect">
+            <a:avLst/>
+          </a:prstGeom>
+          <a:noFill/>
+          <a:ln/>
+        </p:spPr>
+        <p:txBody>
+          <a:bodyPr wrap="square" lIns="25400" tIns="25400" rIns="25400" bIns="25400" rtlCol="0" anchor="ctr">
+            <a:normAutofit/>
+          </a:bodyPr>
+          <a:lstStyle/>
+          <a:p>
+            <a:pPr algn="l" indent="0" marL="0">
+              <a:lnSpc>
+                <a:spcPct val="140000"/>
+              </a:lnSpc>
+              <a:buNone/>
+            </a:pPr>
+            <a:r>
+              <a:rPr lang="en-US" sz="2100" dirty="0">
+                <a:solidFill>
+                  <a:srgbClr val="2C455D"/>
+                </a:solidFill>
+                <a:latin typeface="Courier New" pitchFamily="34" charset="0"/>
+                <a:ea typeface="Courier New" pitchFamily="34" charset="-122"/>
+                <a:cs typeface="Courier New" pitchFamily="34" charset="-120"/>
+              </a:rPr>
+              <a:t>web/</a:t>
+            </a:r>
+            <a:endParaRPr lang="en-US" sz="2100" dirty="0"/>
+          </a:p>
+        </p:txBody>
+      </p:sp>
+      <p:sp>
+        <p:nvSpPr>
+          <p:cNvPr id="47" name="Text 39"/>
+          <p:cNvSpPr/>
+          <p:nvPr/>
+        </p:nvSpPr>
+        <p:spPr>
+          <a:xfrm>
+            <a:off x="4904184" y="8232874"/>
+            <a:ext cx="1804392" cy="456158"/>
+          </a:xfrm>
+          <a:prstGeom prst="rect">
+            <a:avLst/>
+          </a:prstGeom>
+          <a:noFill/>
+          <a:ln/>
+        </p:spPr>
+        <p:txBody>
+          <a:bodyPr wrap="square" lIns="25400" tIns="25400" rIns="25400" bIns="25400" rtlCol="0" anchor="ctr">
+            <a:normAutofit/>
+          </a:bodyPr>
+          <a:lstStyle/>
+          <a:p>
+            <a:pPr algn="l" indent="0" marL="0">
+              <a:lnSpc>
+                <a:spcPct val="135625"/>
+              </a:lnSpc>
+              <a:buNone/>
+            </a:pPr>
+            <a:r>
+              <a:rPr lang="en-US" sz="2100" dirty="0">
+                <a:solidFill>
+                  <a:srgbClr val="5D5D60"/>
+                </a:solidFill>
+                <a:latin typeface="Arial" pitchFamily="34" charset="0"/>
+                <a:ea typeface="Arial" pitchFamily="34" charset="-122"/>
+                <a:cs typeface="Arial" pitchFamily="34" charset="-120"/>
+              </a:rPr>
+              <a:t>兩版共用</a:t>
+            </a:r>
+            <a:endParaRPr lang="en-US" sz="2100" dirty="0"/>
+          </a:p>
+        </p:txBody>
+      </p:sp>
+      <p:sp>
+        <p:nvSpPr>
+          <p:cNvPr id="48" name="Text 40"/>
+          <p:cNvSpPr/>
+          <p:nvPr/>
+        </p:nvSpPr>
+        <p:spPr>
+          <a:xfrm>
+            <a:off x="6860977" y="8232874"/>
+            <a:ext cx="10749516" cy="456158"/>
+          </a:xfrm>
+          <a:prstGeom prst="rect">
+            <a:avLst/>
+          </a:prstGeom>
+          <a:noFill/>
+          <a:ln/>
+        </p:spPr>
+        <p:txBody>
+          <a:bodyPr wrap="square" lIns="25400" tIns="25400" rIns="25400" bIns="25400" rtlCol="0" anchor="ctr">
+            <a:normAutofit/>
+          </a:bodyPr>
+          <a:lstStyle/>
+          <a:p>
+            <a:pPr algn="l" indent="0" marL="0">
+              <a:lnSpc>
+                <a:spcPct val="135625"/>
+              </a:lnSpc>
+              <a:buNone/>
+            </a:pPr>
+            <a:r>
+              <a:rPr lang="en-US" sz="2100" dirty="0">
+                <a:solidFill>
+                  <a:srgbClr val="1D1F20"/>
+                </a:solidFill>
+                <a:latin typeface="Arial" pitchFamily="34" charset="0"/>
+                <a:ea typeface="Arial" pitchFamily="34" charset="-122"/>
+                <a:cs typeface="Arial" pitchFamily="34" charset="-120"/>
+              </a:rPr>
+              <a:t>專案首頁與種子教師指南（發布至 Pages）</a:t>
             </a:r>
             <a:endParaRPr lang="en-US" sz="2100" dirty="0"/>
           </a:p>
@@ -11341,7 +11533,7 @@
                 <a:ea typeface="Arial" pitchFamily="34" charset="-122"/>
                 <a:cs typeface="Arial" pitchFamily="34" charset="-120"/>
               </a:rPr>
-              <a:t>6</a:t>
+              <a:t>7</a:t>
             </a:r>
             <a:endParaRPr lang="en-US" sz="7200" dirty="0"/>
           </a:p>
